--- a/project/02_risc_v/C06_rv32i_cpu_S_i_il_type_add/이준형_rv32i_S_I_IL_type.pptx
+++ b/project/02_risc_v/C06_rv32i_cpu_S_i_il_type_add/이준형_rv32i_S_I_IL_type.pptx
@@ -16,8 +16,10 @@
     <p:sldId id="275" r:id="rId10"/>
     <p:sldId id="277" r:id="rId11"/>
     <p:sldId id="278" r:id="rId12"/>
-    <p:sldId id="270" r:id="rId13"/>
-    <p:sldId id="276" r:id="rId14"/>
+    <p:sldId id="279" r:id="rId13"/>
+    <p:sldId id="280" r:id="rId14"/>
+    <p:sldId id="270" r:id="rId15"/>
+    <p:sldId id="276" r:id="rId16"/>
   </p:sldIdLst>
   <p:sldSz cx="12192000" cy="6858000"/>
   <p:notesSz cx="6858000" cy="9144000"/>
@@ -271,7 +273,7 @@
           <a:p>
             <a:fld id="{6FAD3930-65C8-43FA-8080-9609EAB9FD3E}" type="datetimeFigureOut">
               <a:rPr lang="ko-KR" altLang="en-US" smtClean="0"/>
-              <a:t>2026-03-10</a:t>
+              <a:t>2026-03-11</a:t>
             </a:fld>
             <a:endParaRPr lang="ko-KR" altLang="en-US"/>
           </a:p>
@@ -469,7 +471,7 @@
           <a:p>
             <a:fld id="{6FAD3930-65C8-43FA-8080-9609EAB9FD3E}" type="datetimeFigureOut">
               <a:rPr lang="ko-KR" altLang="en-US" smtClean="0"/>
-              <a:t>2026-03-10</a:t>
+              <a:t>2026-03-11</a:t>
             </a:fld>
             <a:endParaRPr lang="ko-KR" altLang="en-US"/>
           </a:p>
@@ -677,7 +679,7 @@
           <a:p>
             <a:fld id="{6FAD3930-65C8-43FA-8080-9609EAB9FD3E}" type="datetimeFigureOut">
               <a:rPr lang="ko-KR" altLang="en-US" smtClean="0"/>
-              <a:t>2026-03-10</a:t>
+              <a:t>2026-03-11</a:t>
             </a:fld>
             <a:endParaRPr lang="ko-KR" altLang="en-US"/>
           </a:p>
@@ -875,7 +877,7 @@
           <a:p>
             <a:fld id="{6FAD3930-65C8-43FA-8080-9609EAB9FD3E}" type="datetimeFigureOut">
               <a:rPr lang="ko-KR" altLang="en-US" smtClean="0"/>
-              <a:t>2026-03-10</a:t>
+              <a:t>2026-03-11</a:t>
             </a:fld>
             <a:endParaRPr lang="ko-KR" altLang="en-US"/>
           </a:p>
@@ -1150,7 +1152,7 @@
           <a:p>
             <a:fld id="{6FAD3930-65C8-43FA-8080-9609EAB9FD3E}" type="datetimeFigureOut">
               <a:rPr lang="ko-KR" altLang="en-US" smtClean="0"/>
-              <a:t>2026-03-10</a:t>
+              <a:t>2026-03-11</a:t>
             </a:fld>
             <a:endParaRPr lang="ko-KR" altLang="en-US"/>
           </a:p>
@@ -1415,7 +1417,7 @@
           <a:p>
             <a:fld id="{6FAD3930-65C8-43FA-8080-9609EAB9FD3E}" type="datetimeFigureOut">
               <a:rPr lang="ko-KR" altLang="en-US" smtClean="0"/>
-              <a:t>2026-03-10</a:t>
+              <a:t>2026-03-11</a:t>
             </a:fld>
             <a:endParaRPr lang="ko-KR" altLang="en-US"/>
           </a:p>
@@ -1827,7 +1829,7 @@
           <a:p>
             <a:fld id="{6FAD3930-65C8-43FA-8080-9609EAB9FD3E}" type="datetimeFigureOut">
               <a:rPr lang="ko-KR" altLang="en-US" smtClean="0"/>
-              <a:t>2026-03-10</a:t>
+              <a:t>2026-03-11</a:t>
             </a:fld>
             <a:endParaRPr lang="ko-KR" altLang="en-US"/>
           </a:p>
@@ -1968,7 +1970,7 @@
           <a:p>
             <a:fld id="{6FAD3930-65C8-43FA-8080-9609EAB9FD3E}" type="datetimeFigureOut">
               <a:rPr lang="ko-KR" altLang="en-US" smtClean="0"/>
-              <a:t>2026-03-10</a:t>
+              <a:t>2026-03-11</a:t>
             </a:fld>
             <a:endParaRPr lang="ko-KR" altLang="en-US"/>
           </a:p>
@@ -2081,7 +2083,7 @@
           <a:p>
             <a:fld id="{6FAD3930-65C8-43FA-8080-9609EAB9FD3E}" type="datetimeFigureOut">
               <a:rPr lang="ko-KR" altLang="en-US" smtClean="0"/>
-              <a:t>2026-03-10</a:t>
+              <a:t>2026-03-11</a:t>
             </a:fld>
             <a:endParaRPr lang="ko-KR" altLang="en-US"/>
           </a:p>
@@ -2392,7 +2394,7 @@
           <a:p>
             <a:fld id="{6FAD3930-65C8-43FA-8080-9609EAB9FD3E}" type="datetimeFigureOut">
               <a:rPr lang="ko-KR" altLang="en-US" smtClean="0"/>
-              <a:t>2026-03-10</a:t>
+              <a:t>2026-03-11</a:t>
             </a:fld>
             <a:endParaRPr lang="ko-KR" altLang="en-US"/>
           </a:p>
@@ -2680,7 +2682,7 @@
           <a:p>
             <a:fld id="{6FAD3930-65C8-43FA-8080-9609EAB9FD3E}" type="datetimeFigureOut">
               <a:rPr lang="ko-KR" altLang="en-US" smtClean="0"/>
-              <a:t>2026-03-10</a:t>
+              <a:t>2026-03-11</a:t>
             </a:fld>
             <a:endParaRPr lang="ko-KR" altLang="en-US"/>
           </a:p>
@@ -2921,7 +2923,7 @@
           <a:p>
             <a:fld id="{6FAD3930-65C8-43FA-8080-9609EAB9FD3E}" type="datetimeFigureOut">
               <a:rPr lang="ko-KR" altLang="en-US" smtClean="0"/>
-              <a:t>2026-03-10</a:t>
+              <a:t>2026-03-11</a:t>
             </a:fld>
             <a:endParaRPr lang="ko-KR" altLang="en-US"/>
           </a:p>
@@ -3370,11 +3372,7 @@
             </a:br>
             <a:r>
               <a:rPr lang="en-US" altLang="ko-KR" dirty="0" smtClean="0"/>
-              <a:t>S-type &amp; </a:t>
-            </a:r>
-            <a:r>
-              <a:rPr lang="en-US" altLang="ko-KR" dirty="0" smtClean="0"/>
-              <a:t>I-type &amp; IL-type</a:t>
+              <a:t>S-type &amp; I-type &amp; IL-type</a:t>
             </a:r>
             <a:endParaRPr lang="ko-KR" altLang="en-US" dirty="0"/>
           </a:p>
@@ -3466,11 +3464,7 @@
             </a:r>
             <a:r>
               <a:rPr lang="en-US" altLang="ko-KR" dirty="0" smtClean="0"/>
-              <a:t>. IL</a:t>
-            </a:r>
-            <a:r>
-              <a:rPr lang="en-US" altLang="ko-KR" dirty="0" smtClean="0"/>
-              <a:t>-type simulation</a:t>
+              <a:t>. IL-type simulation</a:t>
             </a:r>
             <a:endParaRPr lang="ko-KR" altLang="en-US" dirty="0"/>
           </a:p>
@@ -4187,8 +4181,8 @@
         </p:nvSpPr>
         <p:spPr>
           <a:xfrm>
-            <a:off x="1965649" y="5349551"/>
-            <a:ext cx="6351037" cy="646331"/>
+            <a:off x="1331167" y="5279057"/>
+            <a:ext cx="6351037" cy="1200329"/>
           </a:xfrm>
           <a:prstGeom prst="rect">
             <a:avLst/>
@@ -4201,6 +4195,23 @@
           </a:bodyPr>
           <a:lstStyle/>
           <a:p>
+            <a:r>
+              <a:rPr lang="en-US" altLang="ko-KR" dirty="0" smtClean="0"/>
+              <a:t>[</a:t>
+            </a:r>
+            <a:r>
+              <a:rPr lang="en-US" altLang="ko-KR" dirty="0" err="1" smtClean="0"/>
+              <a:t>control_unit</a:t>
+            </a:r>
+            <a:r>
+              <a:rPr lang="en-US" altLang="ko-KR" dirty="0" smtClean="0"/>
+              <a:t>]</a:t>
+            </a:r>
+          </a:p>
+          <a:p>
+            <a:endParaRPr lang="en-US" altLang="ko-KR" dirty="0" smtClean="0"/>
+          </a:p>
+          <a:p>
             <a:pPr marL="342900" indent="-342900">
               <a:buAutoNum type="arabicPeriod"/>
             </a:pPr>
@@ -4248,19 +4259,26 @@
       </p:sp>
       <p:sp>
         <p:nvSpPr>
-          <p:cNvPr id="6" name="TextBox 5"/>
+          <p:cNvPr id="7" name="TextBox 6"/>
           <p:cNvSpPr txBox="1"/>
           <p:nvPr/>
         </p:nvSpPr>
         <p:spPr>
           <a:xfrm>
-            <a:off x="7240555" y="4640424"/>
-            <a:ext cx="597159" cy="369332"/>
+            <a:off x="2121160" y="3284376"/>
+            <a:ext cx="939281" cy="246221"/>
           </a:xfrm>
           <a:prstGeom prst="rect">
             <a:avLst/>
           </a:prstGeom>
-          <a:noFill/>
+          <a:solidFill>
+            <a:schemeClr val="bg1"/>
+          </a:solidFill>
+          <a:ln>
+            <a:solidFill>
+              <a:schemeClr val="tx1"/>
+            </a:solidFill>
+          </a:ln>
         </p:spPr>
         <p:txBody>
           <a:bodyPr wrap="square" rtlCol="0">
@@ -4269,31 +4287,251 @@
           <a:lstStyle/>
           <a:p>
             <a:r>
-              <a:rPr lang="en-US" altLang="ko-KR" dirty="0" smtClean="0">
-                <a:solidFill>
-                  <a:schemeClr val="bg1"/>
-                </a:solidFill>
-              </a:rPr>
+              <a:rPr lang="en-US" altLang="ko-KR" sz="1000" dirty="0" err="1" smtClean="0"/>
+              <a:t>IL_type</a:t>
+            </a:r>
+            <a:endParaRPr lang="ko-KR" altLang="en-US" sz="1000" dirty="0"/>
+          </a:p>
+        </p:txBody>
+      </p:sp>
+      <p:sp>
+        <p:nvSpPr>
+          <p:cNvPr id="14" name="TextBox 13"/>
+          <p:cNvSpPr txBox="1"/>
+          <p:nvPr/>
+        </p:nvSpPr>
+        <p:spPr>
+          <a:xfrm>
+            <a:off x="2121159" y="3519482"/>
+            <a:ext cx="939281" cy="246221"/>
+          </a:xfrm>
+          <a:prstGeom prst="rect">
+            <a:avLst/>
+          </a:prstGeom>
+          <a:solidFill>
+            <a:schemeClr val="bg1"/>
+          </a:solidFill>
+          <a:ln>
+            <a:solidFill>
+              <a:schemeClr val="tx1"/>
+            </a:solidFill>
+          </a:ln>
+        </p:spPr>
+        <p:txBody>
+          <a:bodyPr wrap="square" rtlCol="0">
+            <a:spAutoFit/>
+          </a:bodyPr>
+          <a:lstStyle/>
+          <a:p>
+            <a:pPr algn="ctr"/>
+            <a:r>
+              <a:rPr lang="en-US" altLang="ko-KR" sz="1000" dirty="0" smtClean="0"/>
+              <a:t>1</a:t>
+            </a:r>
+            <a:endParaRPr lang="ko-KR" altLang="en-US" sz="1000" dirty="0"/>
+          </a:p>
+        </p:txBody>
+      </p:sp>
+      <p:sp>
+        <p:nvSpPr>
+          <p:cNvPr id="16" name="TextBox 15"/>
+          <p:cNvSpPr txBox="1"/>
+          <p:nvPr/>
+        </p:nvSpPr>
+        <p:spPr>
+          <a:xfrm>
+            <a:off x="2121158" y="3760034"/>
+            <a:ext cx="939281" cy="246221"/>
+          </a:xfrm>
+          <a:prstGeom prst="rect">
+            <a:avLst/>
+          </a:prstGeom>
+          <a:solidFill>
+            <a:schemeClr val="bg1"/>
+          </a:solidFill>
+          <a:ln>
+            <a:solidFill>
+              <a:schemeClr val="tx1"/>
+            </a:solidFill>
+          </a:ln>
+        </p:spPr>
+        <p:txBody>
+          <a:bodyPr wrap="square" rtlCol="0">
+            <a:spAutoFit/>
+          </a:bodyPr>
+          <a:lstStyle/>
+          <a:p>
+            <a:pPr algn="ctr"/>
+            <a:r>
+              <a:rPr lang="en-US" altLang="ko-KR" sz="1000" dirty="0"/>
               <a:t>0</a:t>
             </a:r>
-            <a:endParaRPr lang="ko-KR" altLang="en-US" dirty="0">
-              <a:solidFill>
-                <a:schemeClr val="bg1"/>
-              </a:solidFill>
-            </a:endParaRPr>
+            <a:endParaRPr lang="ko-KR" altLang="en-US" sz="1000" dirty="0"/>
+          </a:p>
+        </p:txBody>
+      </p:sp>
+      <p:sp>
+        <p:nvSpPr>
+          <p:cNvPr id="17" name="TextBox 16"/>
+          <p:cNvSpPr txBox="1"/>
+          <p:nvPr/>
+        </p:nvSpPr>
+        <p:spPr>
+          <a:xfrm>
+            <a:off x="2121158" y="3994746"/>
+            <a:ext cx="939281" cy="246221"/>
+          </a:xfrm>
+          <a:prstGeom prst="rect">
+            <a:avLst/>
+          </a:prstGeom>
+          <a:solidFill>
+            <a:schemeClr val="bg1"/>
+          </a:solidFill>
+          <a:ln>
+            <a:solidFill>
+              <a:schemeClr val="tx1"/>
+            </a:solidFill>
+          </a:ln>
+        </p:spPr>
+        <p:txBody>
+          <a:bodyPr wrap="square" rtlCol="0">
+            <a:spAutoFit/>
+          </a:bodyPr>
+          <a:lstStyle/>
+          <a:p>
+            <a:pPr algn="ctr"/>
+            <a:r>
+              <a:rPr lang="en-US" altLang="ko-KR" sz="1000" dirty="0"/>
+              <a:t>1</a:t>
+            </a:r>
+            <a:endParaRPr lang="ko-KR" altLang="en-US" sz="1000" dirty="0"/>
+          </a:p>
+        </p:txBody>
+      </p:sp>
+      <p:sp>
+        <p:nvSpPr>
+          <p:cNvPr id="19" name="TextBox 18"/>
+          <p:cNvSpPr txBox="1"/>
+          <p:nvPr/>
+        </p:nvSpPr>
+        <p:spPr>
+          <a:xfrm>
+            <a:off x="2121160" y="4240967"/>
+            <a:ext cx="939280" cy="246221"/>
+          </a:xfrm>
+          <a:prstGeom prst="rect">
+            <a:avLst/>
+          </a:prstGeom>
+          <a:solidFill>
+            <a:schemeClr val="bg1"/>
+          </a:solidFill>
+          <a:ln>
+            <a:solidFill>
+              <a:schemeClr val="tx1"/>
+            </a:solidFill>
+          </a:ln>
+        </p:spPr>
+        <p:txBody>
+          <a:bodyPr wrap="square" rtlCol="0">
+            <a:spAutoFit/>
+          </a:bodyPr>
+          <a:lstStyle/>
+          <a:p>
+            <a:pPr algn="ctr"/>
+            <a:r>
+              <a:rPr lang="en-US" altLang="ko-KR" sz="1000" dirty="0" smtClean="0"/>
+              <a:t>ADD</a:t>
+            </a:r>
+            <a:endParaRPr lang="ko-KR" altLang="en-US" sz="1000" dirty="0"/>
+          </a:p>
+        </p:txBody>
+      </p:sp>
+      <p:sp>
+        <p:nvSpPr>
+          <p:cNvPr id="20" name="TextBox 19"/>
+          <p:cNvSpPr txBox="1"/>
+          <p:nvPr/>
+        </p:nvSpPr>
+        <p:spPr>
+          <a:xfrm>
+            <a:off x="2121159" y="4475679"/>
+            <a:ext cx="939280" cy="246221"/>
+          </a:xfrm>
+          <a:prstGeom prst="rect">
+            <a:avLst/>
+          </a:prstGeom>
+          <a:solidFill>
+            <a:schemeClr val="bg1"/>
+          </a:solidFill>
+          <a:ln>
+            <a:solidFill>
+              <a:schemeClr val="tx1"/>
+            </a:solidFill>
+          </a:ln>
+        </p:spPr>
+        <p:txBody>
+          <a:bodyPr wrap="square" rtlCol="0">
+            <a:spAutoFit/>
+          </a:bodyPr>
+          <a:lstStyle/>
+          <a:p>
+            <a:pPr algn="ctr"/>
+            <a:r>
+              <a:rPr lang="en-US" altLang="ko-KR" sz="1000" dirty="0" smtClean="0"/>
+              <a:t>input funct3</a:t>
+            </a:r>
+            <a:endParaRPr lang="ko-KR" altLang="en-US" sz="1000" dirty="0"/>
+          </a:p>
+        </p:txBody>
+      </p:sp>
+      <p:sp>
+        <p:nvSpPr>
+          <p:cNvPr id="21" name="TextBox 20"/>
+          <p:cNvSpPr txBox="1"/>
+          <p:nvPr/>
+        </p:nvSpPr>
+        <p:spPr>
+          <a:xfrm>
+            <a:off x="2121159" y="4727188"/>
+            <a:ext cx="939280" cy="246221"/>
+          </a:xfrm>
+          <a:prstGeom prst="rect">
+            <a:avLst/>
+          </a:prstGeom>
+          <a:solidFill>
+            <a:schemeClr val="bg1"/>
+          </a:solidFill>
+          <a:ln>
+            <a:solidFill>
+              <a:schemeClr val="tx1"/>
+            </a:solidFill>
+          </a:ln>
+        </p:spPr>
+        <p:txBody>
+          <a:bodyPr wrap="square" rtlCol="0">
+            <a:spAutoFit/>
+          </a:bodyPr>
+          <a:lstStyle/>
+          <a:p>
+            <a:pPr algn="ctr"/>
+            <a:r>
+              <a:rPr lang="en-US" altLang="ko-KR" sz="1000" dirty="0"/>
+              <a:t>0</a:t>
+            </a:r>
+            <a:endParaRPr lang="ko-KR" altLang="en-US" sz="1000" dirty="0"/>
           </a:p>
         </p:txBody>
       </p:sp>
       <p:cxnSp>
         <p:nvCxnSpPr>
-          <p:cNvPr id="8" name="직선 화살표 연결선 7"/>
+          <p:cNvPr id="22" name="직선 화살표 연결선 21"/>
           <p:cNvCxnSpPr/>
           <p:nvPr/>
         </p:nvCxnSpPr>
         <p:spPr>
           <a:xfrm flipV="1">
-            <a:off x="7601339" y="2475722"/>
-            <a:ext cx="2071396" cy="2301551"/>
+            <a:off x="3060439" y="167951"/>
+            <a:ext cx="5984034" cy="3925078"/>
           </a:xfrm>
           <a:prstGeom prst="straightConnector1">
             <a:avLst/>
@@ -4320,160 +4558,6 @@
           </a:fontRef>
         </p:style>
       </p:cxnSp>
-      <p:cxnSp>
-        <p:nvCxnSpPr>
-          <p:cNvPr id="10" name="직선 화살표 연결선 9"/>
-          <p:cNvCxnSpPr/>
-          <p:nvPr/>
-        </p:nvCxnSpPr>
-        <p:spPr>
-          <a:xfrm flipV="1">
-            <a:off x="7685314" y="1788972"/>
-            <a:ext cx="1408923" cy="2441743"/>
-          </a:xfrm>
-          <a:prstGeom prst="straightConnector1">
-            <a:avLst/>
-          </a:prstGeom>
-          <a:ln w="76200">
-            <a:solidFill>
-              <a:srgbClr val="FFFF00"/>
-            </a:solidFill>
-            <a:tailEnd type="triangle"/>
-          </a:ln>
-        </p:spPr>
-        <p:style>
-          <a:lnRef idx="2">
-            <a:schemeClr val="accent1"/>
-          </a:lnRef>
-          <a:fillRef idx="0">
-            <a:schemeClr val="accent1"/>
-          </a:fillRef>
-          <a:effectRef idx="1">
-            <a:schemeClr val="accent1"/>
-          </a:effectRef>
-          <a:fontRef idx="minor">
-            <a:schemeClr val="tx1"/>
-          </a:fontRef>
-        </p:style>
-      </p:cxnSp>
-      <p:cxnSp>
-        <p:nvCxnSpPr>
-          <p:cNvPr id="13" name="직선 화살표 연결선 12"/>
-          <p:cNvCxnSpPr/>
-          <p:nvPr/>
-        </p:nvCxnSpPr>
-        <p:spPr>
-          <a:xfrm flipV="1">
-            <a:off x="838200" y="609600"/>
-            <a:ext cx="8206273" cy="3024478"/>
-          </a:xfrm>
-          <a:prstGeom prst="straightConnector1">
-            <a:avLst/>
-          </a:prstGeom>
-          <a:ln w="76200">
-            <a:solidFill>
-              <a:srgbClr val="FFFF00"/>
-            </a:solidFill>
-            <a:tailEnd type="triangle"/>
-          </a:ln>
-        </p:spPr>
-        <p:style>
-          <a:lnRef idx="2">
-            <a:schemeClr val="accent1"/>
-          </a:lnRef>
-          <a:fillRef idx="0">
-            <a:schemeClr val="accent1"/>
-          </a:fillRef>
-          <a:effectRef idx="1">
-            <a:schemeClr val="accent1"/>
-          </a:effectRef>
-          <a:fontRef idx="minor">
-            <a:schemeClr val="tx1"/>
-          </a:fontRef>
-        </p:style>
-      </p:cxnSp>
-      <p:cxnSp>
-        <p:nvCxnSpPr>
-          <p:cNvPr id="15" name="직선 화살표 연결선 14"/>
-          <p:cNvCxnSpPr/>
-          <p:nvPr/>
-        </p:nvCxnSpPr>
-        <p:spPr>
-          <a:xfrm flipV="1">
-            <a:off x="1142223" y="914341"/>
-            <a:ext cx="7840046" cy="2944578"/>
-          </a:xfrm>
-          <a:prstGeom prst="straightConnector1">
-            <a:avLst/>
-          </a:prstGeom>
-          <a:ln w="76200">
-            <a:solidFill>
-              <a:srgbClr val="FFFF00"/>
-            </a:solidFill>
-            <a:tailEnd type="triangle"/>
-          </a:ln>
-        </p:spPr>
-        <p:style>
-          <a:lnRef idx="2">
-            <a:schemeClr val="accent1"/>
-          </a:lnRef>
-          <a:fillRef idx="0">
-            <a:schemeClr val="accent1"/>
-          </a:fillRef>
-          <a:effectRef idx="1">
-            <a:schemeClr val="accent1"/>
-          </a:effectRef>
-          <a:fontRef idx="minor">
-            <a:schemeClr val="tx1"/>
-          </a:fontRef>
-        </p:style>
-      </p:cxnSp>
-      <p:sp>
-        <p:nvSpPr>
-          <p:cNvPr id="18" name="타원 17"/>
-          <p:cNvSpPr/>
-          <p:nvPr/>
-        </p:nvSpPr>
-        <p:spPr>
-          <a:xfrm>
-            <a:off x="7240554" y="3273189"/>
-            <a:ext cx="889519" cy="256688"/>
-          </a:xfrm>
-          <a:prstGeom prst="ellipse">
-            <a:avLst/>
-          </a:prstGeom>
-          <a:noFill/>
-          <a:ln w="57150">
-            <a:solidFill>
-              <a:srgbClr val="FFFF00"/>
-            </a:solidFill>
-          </a:ln>
-        </p:spPr>
-        <p:style>
-          <a:lnRef idx="2">
-            <a:schemeClr val="accent1">
-              <a:shade val="50000"/>
-            </a:schemeClr>
-          </a:lnRef>
-          <a:fillRef idx="1">
-            <a:schemeClr val="accent1"/>
-          </a:fillRef>
-          <a:effectRef idx="0">
-            <a:schemeClr val="accent1"/>
-          </a:effectRef>
-          <a:fontRef idx="minor">
-            <a:schemeClr val="lt1"/>
-          </a:fontRef>
-        </p:style>
-        <p:txBody>
-          <a:bodyPr rtlCol="0" anchor="ctr"/>
-          <a:lstStyle/>
-          <a:p>
-            <a:pPr algn="ctr"/>
-            <a:endParaRPr lang="ko-KR" altLang="en-US"/>
-          </a:p>
-        </p:txBody>
-      </p:sp>
     </p:spTree>
     <p:extLst>
       <p:ext uri="{BB962C8B-B14F-4D97-AF65-F5344CB8AC3E}">
@@ -4531,78 +4615,7 @@
             </a:r>
             <a:r>
               <a:rPr lang="en-US" altLang="ko-KR" dirty="0" smtClean="0"/>
-              <a:t>. IL</a:t>
-            </a:r>
-            <a:r>
-              <a:rPr lang="en-US" altLang="ko-KR" dirty="0" smtClean="0"/>
-              <a:t>-type simulation</a:t>
-            </a:r>
-            <a:endParaRPr lang="ko-KR" altLang="en-US" dirty="0"/>
-          </a:p>
-        </p:txBody>
-      </p:sp>
-      <p:sp>
-        <p:nvSpPr>
-          <p:cNvPr id="5" name="TextBox 4"/>
-          <p:cNvSpPr txBox="1"/>
-          <p:nvPr/>
-        </p:nvSpPr>
-        <p:spPr>
-          <a:xfrm>
-            <a:off x="1965649" y="5349551"/>
-            <a:ext cx="6351037" cy="646331"/>
-          </a:xfrm>
-          <a:prstGeom prst="rect">
-            <a:avLst/>
-          </a:prstGeom>
-          <a:noFill/>
-        </p:spPr>
-        <p:txBody>
-          <a:bodyPr wrap="square" rtlCol="0">
-            <a:spAutoFit/>
-          </a:bodyPr>
-          <a:lstStyle/>
-          <a:p>
-            <a:pPr marL="342900" indent="-342900">
-              <a:buAutoNum type="arabicPeriod"/>
-            </a:pPr>
-            <a:r>
-              <a:rPr lang="en-US" altLang="ko-KR" dirty="0" err="1" smtClean="0"/>
-              <a:t>ctrl_unit</a:t>
-            </a:r>
-            <a:r>
-              <a:rPr lang="ko-KR" altLang="en-US" dirty="0" smtClean="0"/>
-              <a:t>의 제어 신호가 </a:t>
-            </a:r>
-            <a:r>
-              <a:rPr lang="ko-KR" altLang="en-US" dirty="0" err="1" smtClean="0"/>
-              <a:t>정상정을로</a:t>
-            </a:r>
-            <a:r>
-              <a:rPr lang="ko-KR" altLang="en-US" dirty="0" smtClean="0"/>
-              <a:t> 출력되는 것을 확인</a:t>
-            </a:r>
-            <a:endParaRPr lang="en-US" altLang="ko-KR" dirty="0" smtClean="0"/>
-          </a:p>
-          <a:p>
-            <a:pPr marL="342900" indent="-342900">
-              <a:buAutoNum type="arabicPeriod"/>
-            </a:pPr>
-            <a:r>
-              <a:rPr lang="en-US" altLang="ko-KR" dirty="0" smtClean="0"/>
-              <a:t>o_funct3</a:t>
-            </a:r>
-            <a:r>
-              <a:rPr lang="ko-KR" altLang="en-US" dirty="0" smtClean="0"/>
-              <a:t>는 </a:t>
-            </a:r>
-            <a:r>
-              <a:rPr lang="en-US" altLang="ko-KR" dirty="0" smtClean="0"/>
-              <a:t>i_funct3</a:t>
-            </a:r>
-            <a:r>
-              <a:rPr lang="ko-KR" altLang="en-US" dirty="0" smtClean="0"/>
-              <a:t>를 출력하는 것을 확인</a:t>
+              <a:t>. IL-type simulation</a:t>
             </a:r>
             <a:endParaRPr lang="ko-KR" altLang="en-US" dirty="0"/>
           </a:p>
@@ -4643,6 +4656,448 @@
                 <a:schemeClr val="bg1"/>
               </a:solidFill>
             </a:endParaRPr>
+          </a:p>
+        </p:txBody>
+      </p:sp>
+      <p:pic>
+        <p:nvPicPr>
+          <p:cNvPr id="4" name="그림 3"/>
+          <p:cNvPicPr>
+            <a:picLocks noChangeAspect="1"/>
+          </p:cNvPicPr>
+          <p:nvPr/>
+        </p:nvPicPr>
+        <p:blipFill>
+          <a:blip r:embed="rId2"/>
+          <a:stretch>
+            <a:fillRect/>
+          </a:stretch>
+        </p:blipFill>
+        <p:spPr>
+          <a:xfrm>
+            <a:off x="9701322" y="797116"/>
+            <a:ext cx="2276793" cy="5563376"/>
+          </a:xfrm>
+          <a:prstGeom prst="rect">
+            <a:avLst/>
+          </a:prstGeom>
+        </p:spPr>
+      </p:pic>
+      <p:pic>
+        <p:nvPicPr>
+          <p:cNvPr id="7" name="그림 6"/>
+          <p:cNvPicPr>
+            <a:picLocks noChangeAspect="1"/>
+          </p:cNvPicPr>
+          <p:nvPr/>
+        </p:nvPicPr>
+        <p:blipFill>
+          <a:blip r:embed="rId3"/>
+          <a:stretch>
+            <a:fillRect/>
+          </a:stretch>
+        </p:blipFill>
+        <p:spPr>
+          <a:xfrm>
+            <a:off x="0" y="2473281"/>
+            <a:ext cx="9522372" cy="1886213"/>
+          </a:xfrm>
+          <a:prstGeom prst="rect">
+            <a:avLst/>
+          </a:prstGeom>
+        </p:spPr>
+      </p:pic>
+      <p:sp>
+        <p:nvSpPr>
+          <p:cNvPr id="8" name="TextBox 7"/>
+          <p:cNvSpPr txBox="1"/>
+          <p:nvPr/>
+        </p:nvSpPr>
+        <p:spPr>
+          <a:xfrm>
+            <a:off x="3117541" y="4359494"/>
+            <a:ext cx="1151761" cy="246221"/>
+          </a:xfrm>
+          <a:prstGeom prst="rect">
+            <a:avLst/>
+          </a:prstGeom>
+          <a:solidFill>
+            <a:schemeClr val="bg1"/>
+          </a:solidFill>
+          <a:ln>
+            <a:solidFill>
+              <a:schemeClr val="tx1"/>
+            </a:solidFill>
+          </a:ln>
+        </p:spPr>
+        <p:txBody>
+          <a:bodyPr wrap="square" rtlCol="0">
+            <a:spAutoFit/>
+          </a:bodyPr>
+          <a:lstStyle/>
+          <a:p>
+            <a:pPr algn="ctr"/>
+            <a:r>
+              <a:rPr lang="en-US" altLang="ko-KR" sz="1000" dirty="0" smtClean="0"/>
+              <a:t>LB sim</a:t>
+            </a:r>
+            <a:endParaRPr lang="ko-KR" altLang="en-US" sz="1000" dirty="0"/>
+          </a:p>
+        </p:txBody>
+      </p:sp>
+      <p:sp>
+        <p:nvSpPr>
+          <p:cNvPr id="9" name="TextBox 8"/>
+          <p:cNvSpPr txBox="1"/>
+          <p:nvPr/>
+        </p:nvSpPr>
+        <p:spPr>
+          <a:xfrm>
+            <a:off x="4269302" y="4359493"/>
+            <a:ext cx="1311691" cy="246221"/>
+          </a:xfrm>
+          <a:prstGeom prst="rect">
+            <a:avLst/>
+          </a:prstGeom>
+          <a:solidFill>
+            <a:schemeClr val="bg1"/>
+          </a:solidFill>
+          <a:ln>
+            <a:solidFill>
+              <a:schemeClr val="tx1"/>
+            </a:solidFill>
+          </a:ln>
+        </p:spPr>
+        <p:txBody>
+          <a:bodyPr wrap="square" rtlCol="0">
+            <a:spAutoFit/>
+          </a:bodyPr>
+          <a:lstStyle/>
+          <a:p>
+            <a:pPr algn="ctr"/>
+            <a:r>
+              <a:rPr lang="en-US" altLang="ko-KR" sz="1000" dirty="0" smtClean="0"/>
+              <a:t>LH sim</a:t>
+            </a:r>
+            <a:endParaRPr lang="ko-KR" altLang="en-US" sz="1000" dirty="0"/>
+          </a:p>
+        </p:txBody>
+      </p:sp>
+      <p:sp>
+        <p:nvSpPr>
+          <p:cNvPr id="10" name="TextBox 9"/>
+          <p:cNvSpPr txBox="1"/>
+          <p:nvPr/>
+        </p:nvSpPr>
+        <p:spPr>
+          <a:xfrm>
+            <a:off x="5584146" y="4359492"/>
+            <a:ext cx="1311691" cy="246221"/>
+          </a:xfrm>
+          <a:prstGeom prst="rect">
+            <a:avLst/>
+          </a:prstGeom>
+          <a:solidFill>
+            <a:schemeClr val="bg1"/>
+          </a:solidFill>
+          <a:ln>
+            <a:solidFill>
+              <a:schemeClr val="tx1"/>
+            </a:solidFill>
+          </a:ln>
+        </p:spPr>
+        <p:txBody>
+          <a:bodyPr wrap="square" rtlCol="0">
+            <a:spAutoFit/>
+          </a:bodyPr>
+          <a:lstStyle/>
+          <a:p>
+            <a:pPr algn="ctr"/>
+            <a:r>
+              <a:rPr lang="en-US" altLang="ko-KR" sz="1000" dirty="0" smtClean="0"/>
+              <a:t>LW sim</a:t>
+            </a:r>
+            <a:endParaRPr lang="ko-KR" altLang="en-US" sz="1000" dirty="0"/>
+          </a:p>
+        </p:txBody>
+      </p:sp>
+      <p:sp>
+        <p:nvSpPr>
+          <p:cNvPr id="11" name="TextBox 10"/>
+          <p:cNvSpPr txBox="1"/>
+          <p:nvPr/>
+        </p:nvSpPr>
+        <p:spPr>
+          <a:xfrm>
+            <a:off x="6898990" y="4359491"/>
+            <a:ext cx="1311691" cy="246221"/>
+          </a:xfrm>
+          <a:prstGeom prst="rect">
+            <a:avLst/>
+          </a:prstGeom>
+          <a:solidFill>
+            <a:schemeClr val="bg1"/>
+          </a:solidFill>
+          <a:ln>
+            <a:solidFill>
+              <a:schemeClr val="tx1"/>
+            </a:solidFill>
+          </a:ln>
+        </p:spPr>
+        <p:txBody>
+          <a:bodyPr wrap="square" rtlCol="0">
+            <a:spAutoFit/>
+          </a:bodyPr>
+          <a:lstStyle/>
+          <a:p>
+            <a:pPr algn="ctr"/>
+            <a:r>
+              <a:rPr lang="en-US" altLang="ko-KR" sz="1000" dirty="0" smtClean="0"/>
+              <a:t>LBU sim</a:t>
+            </a:r>
+            <a:endParaRPr lang="ko-KR" altLang="en-US" sz="1000" dirty="0"/>
+          </a:p>
+        </p:txBody>
+      </p:sp>
+      <p:sp>
+        <p:nvSpPr>
+          <p:cNvPr id="12" name="TextBox 11"/>
+          <p:cNvSpPr txBox="1"/>
+          <p:nvPr/>
+        </p:nvSpPr>
+        <p:spPr>
+          <a:xfrm>
+            <a:off x="8212257" y="4358546"/>
+            <a:ext cx="1311691" cy="246221"/>
+          </a:xfrm>
+          <a:prstGeom prst="rect">
+            <a:avLst/>
+          </a:prstGeom>
+          <a:solidFill>
+            <a:schemeClr val="bg1"/>
+          </a:solidFill>
+          <a:ln>
+            <a:solidFill>
+              <a:schemeClr val="tx1"/>
+            </a:solidFill>
+          </a:ln>
+        </p:spPr>
+        <p:txBody>
+          <a:bodyPr wrap="square" rtlCol="0">
+            <a:spAutoFit/>
+          </a:bodyPr>
+          <a:lstStyle/>
+          <a:p>
+            <a:pPr algn="ctr"/>
+            <a:r>
+              <a:rPr lang="en-US" altLang="ko-KR" sz="1000" dirty="0" smtClean="0"/>
+              <a:t>LHU sim</a:t>
+            </a:r>
+            <a:endParaRPr lang="ko-KR" altLang="en-US" sz="1000" dirty="0"/>
+          </a:p>
+        </p:txBody>
+      </p:sp>
+      <p:sp>
+        <p:nvSpPr>
+          <p:cNvPr id="13" name="TextBox 12"/>
+          <p:cNvSpPr txBox="1"/>
+          <p:nvPr/>
+        </p:nvSpPr>
+        <p:spPr>
+          <a:xfrm>
+            <a:off x="1233036" y="3244346"/>
+            <a:ext cx="1151761" cy="246221"/>
+          </a:xfrm>
+          <a:prstGeom prst="rect">
+            <a:avLst/>
+          </a:prstGeom>
+          <a:solidFill>
+            <a:schemeClr val="bg1"/>
+          </a:solidFill>
+          <a:ln>
+            <a:solidFill>
+              <a:schemeClr val="tx1"/>
+            </a:solidFill>
+          </a:ln>
+        </p:spPr>
+        <p:txBody>
+          <a:bodyPr wrap="square" rtlCol="0">
+            <a:spAutoFit/>
+          </a:bodyPr>
+          <a:lstStyle/>
+          <a:p>
+            <a:pPr algn="ctr"/>
+            <a:r>
+              <a:rPr lang="en-US" altLang="ko-KR" sz="1000" dirty="0" err="1" smtClean="0"/>
+              <a:t>register_src</a:t>
+            </a:r>
+            <a:endParaRPr lang="ko-KR" altLang="en-US" sz="1000" dirty="0"/>
+          </a:p>
+        </p:txBody>
+      </p:sp>
+      <p:sp>
+        <p:nvSpPr>
+          <p:cNvPr id="14" name="TextBox 13"/>
+          <p:cNvSpPr txBox="1"/>
+          <p:nvPr/>
+        </p:nvSpPr>
+        <p:spPr>
+          <a:xfrm>
+            <a:off x="1233036" y="3490093"/>
+            <a:ext cx="1151761" cy="246221"/>
+          </a:xfrm>
+          <a:prstGeom prst="rect">
+            <a:avLst/>
+          </a:prstGeom>
+          <a:solidFill>
+            <a:schemeClr val="bg1"/>
+          </a:solidFill>
+          <a:ln>
+            <a:solidFill>
+              <a:schemeClr val="tx1"/>
+            </a:solidFill>
+          </a:ln>
+        </p:spPr>
+        <p:txBody>
+          <a:bodyPr wrap="square" rtlCol="0">
+            <a:spAutoFit/>
+          </a:bodyPr>
+          <a:lstStyle/>
+          <a:p>
+            <a:pPr algn="ctr"/>
+            <a:r>
+              <a:rPr lang="en-US" altLang="ko-KR" sz="1000" dirty="0" err="1" smtClean="0"/>
+              <a:t>imm_src</a:t>
+            </a:r>
+            <a:endParaRPr lang="ko-KR" altLang="en-US" sz="1000" dirty="0"/>
+          </a:p>
+        </p:txBody>
+      </p:sp>
+      <p:sp>
+        <p:nvSpPr>
+          <p:cNvPr id="15" name="TextBox 14"/>
+          <p:cNvSpPr txBox="1"/>
+          <p:nvPr/>
+        </p:nvSpPr>
+        <p:spPr>
+          <a:xfrm>
+            <a:off x="1331166" y="5279057"/>
+            <a:ext cx="8254267" cy="1200329"/>
+          </a:xfrm>
+          <a:prstGeom prst="rect">
+            <a:avLst/>
+          </a:prstGeom>
+          <a:noFill/>
+        </p:spPr>
+        <p:txBody>
+          <a:bodyPr wrap="square" rtlCol="0">
+            <a:spAutoFit/>
+          </a:bodyPr>
+          <a:lstStyle/>
+          <a:p>
+            <a:r>
+              <a:rPr lang="en-US" altLang="ko-KR" dirty="0" smtClean="0"/>
+              <a:t>[</a:t>
+            </a:r>
+            <a:r>
+              <a:rPr lang="en-US" altLang="ko-KR" dirty="0" smtClean="0"/>
+              <a:t>ALU</a:t>
+            </a:r>
+            <a:r>
+              <a:rPr lang="en-US" altLang="ko-KR" dirty="0" smtClean="0"/>
+              <a:t>]</a:t>
+            </a:r>
+          </a:p>
+          <a:p>
+            <a:endParaRPr lang="en-US" altLang="ko-KR" dirty="0" smtClean="0"/>
+          </a:p>
+          <a:p>
+            <a:pPr marL="342900" indent="-342900">
+              <a:buAutoNum type="arabicPeriod"/>
+            </a:pPr>
+            <a:r>
+              <a:rPr lang="ko-KR" altLang="en-US" dirty="0" smtClean="0"/>
+              <a:t>각 </a:t>
+            </a:r>
+            <a:r>
+              <a:rPr lang="en-US" altLang="ko-KR" dirty="0" smtClean="0"/>
+              <a:t>part simulation</a:t>
+            </a:r>
+            <a:r>
+              <a:rPr lang="ko-KR" altLang="en-US" dirty="0" smtClean="0"/>
+              <a:t>마다 </a:t>
+            </a:r>
+            <a:r>
+              <a:rPr lang="en-US" altLang="ko-KR" dirty="0" smtClean="0"/>
+              <a:t>b(</a:t>
+            </a:r>
+            <a:r>
+              <a:rPr lang="en-US" altLang="ko-KR" dirty="0" err="1" smtClean="0"/>
+              <a:t>imm_src</a:t>
+            </a:r>
+            <a:r>
+              <a:rPr lang="en-US" altLang="ko-KR" dirty="0" smtClean="0"/>
+              <a:t>)</a:t>
+            </a:r>
+            <a:r>
+              <a:rPr lang="ko-KR" altLang="en-US" dirty="0" smtClean="0"/>
+              <a:t>값</a:t>
+            </a:r>
+            <a:r>
+              <a:rPr lang="ko-KR" altLang="en-US" dirty="0"/>
+              <a:t>이</a:t>
+            </a:r>
+            <a:r>
+              <a:rPr lang="ko-KR" altLang="en-US" dirty="0" smtClean="0"/>
+              <a:t> </a:t>
+            </a:r>
+            <a:r>
+              <a:rPr lang="en-US" altLang="ko-KR" dirty="0" smtClean="0"/>
+              <a:t>0~3</a:t>
+            </a:r>
+            <a:r>
+              <a:rPr lang="ko-KR" altLang="en-US" dirty="0" smtClean="0"/>
+              <a:t>으로 순차 입력되는 것을 확인</a:t>
+            </a:r>
+            <a:endParaRPr lang="en-US" altLang="ko-KR" dirty="0" smtClean="0"/>
+          </a:p>
+          <a:p>
+            <a:pPr marL="342900" indent="-342900">
+              <a:buAutoNum type="arabicPeriod"/>
+            </a:pPr>
+            <a:r>
+              <a:rPr lang="ko-KR" altLang="en-US" dirty="0" smtClean="0"/>
+              <a:t>각 </a:t>
+            </a:r>
+            <a:r>
+              <a:rPr lang="en-US" altLang="ko-KR" dirty="0" smtClean="0"/>
+              <a:t>part </a:t>
+            </a:r>
+            <a:r>
+              <a:rPr lang="en-US" altLang="ko-KR" dirty="0" err="1" smtClean="0"/>
+              <a:t>simulatio</a:t>
+            </a:r>
+            <a:r>
+              <a:rPr lang="ko-KR" altLang="en-US" dirty="0" smtClean="0"/>
+              <a:t>마다 </a:t>
+            </a:r>
+            <a:r>
+              <a:rPr lang="en-US" altLang="ko-KR" dirty="0" err="1" smtClean="0"/>
+              <a:t>alu_resul</a:t>
+            </a:r>
+            <a:r>
+              <a:rPr lang="ko-KR" altLang="en-US" dirty="0" smtClean="0"/>
+              <a:t>값이 </a:t>
+            </a:r>
+            <a:r>
+              <a:rPr lang="en-US" altLang="ko-KR" dirty="0" smtClean="0"/>
+              <a:t>0~3</a:t>
+            </a:r>
+            <a:r>
+              <a:rPr lang="ko-KR" altLang="en-US" dirty="0" smtClean="0"/>
+              <a:t>으로 순차 출력되는 것을 확인</a:t>
+            </a:r>
+            <a:endParaRPr lang="en-US" altLang="ko-KR" dirty="0" smtClean="0"/>
           </a:p>
         </p:txBody>
       </p:sp>
@@ -4699,15 +5154,1202 @@
           <a:p>
             <a:r>
               <a:rPr lang="en-US" altLang="ko-KR" dirty="0"/>
+              <a:t>4</a:t>
+            </a:r>
+            <a:r>
+              <a:rPr lang="en-US" altLang="ko-KR" dirty="0" smtClean="0"/>
+              <a:t>. IL-type simulation</a:t>
+            </a:r>
+            <a:endParaRPr lang="ko-KR" altLang="en-US" dirty="0"/>
+          </a:p>
+        </p:txBody>
+      </p:sp>
+      <p:sp>
+        <p:nvSpPr>
+          <p:cNvPr id="6" name="TextBox 5"/>
+          <p:cNvSpPr txBox="1"/>
+          <p:nvPr/>
+        </p:nvSpPr>
+        <p:spPr>
+          <a:xfrm>
+            <a:off x="7240555" y="4640424"/>
+            <a:ext cx="597159" cy="369332"/>
+          </a:xfrm>
+          <a:prstGeom prst="rect">
+            <a:avLst/>
+          </a:prstGeom>
+          <a:noFill/>
+        </p:spPr>
+        <p:txBody>
+          <a:bodyPr wrap="square" rtlCol="0">
+            <a:spAutoFit/>
+          </a:bodyPr>
+          <a:lstStyle/>
+          <a:p>
+            <a:r>
+              <a:rPr lang="en-US" altLang="ko-KR" dirty="0" smtClean="0">
+                <a:solidFill>
+                  <a:schemeClr val="bg1"/>
+                </a:solidFill>
+              </a:rPr>
+              <a:t>0</a:t>
+            </a:r>
+            <a:endParaRPr lang="ko-KR" altLang="en-US" dirty="0">
+              <a:solidFill>
+                <a:schemeClr val="bg1"/>
+              </a:solidFill>
+            </a:endParaRPr>
+          </a:p>
+        </p:txBody>
+      </p:sp>
+      <p:pic>
+        <p:nvPicPr>
+          <p:cNvPr id="4" name="그림 3"/>
+          <p:cNvPicPr>
+            <a:picLocks noChangeAspect="1"/>
+          </p:cNvPicPr>
+          <p:nvPr/>
+        </p:nvPicPr>
+        <p:blipFill>
+          <a:blip r:embed="rId2"/>
+          <a:stretch>
+            <a:fillRect/>
+          </a:stretch>
+        </p:blipFill>
+        <p:spPr>
+          <a:xfrm>
+            <a:off x="0" y="1768395"/>
+            <a:ext cx="12192000" cy="2374783"/>
+          </a:xfrm>
+          <a:prstGeom prst="rect">
+            <a:avLst/>
+          </a:prstGeom>
+        </p:spPr>
+      </p:pic>
+      <p:sp>
+        <p:nvSpPr>
+          <p:cNvPr id="7" name="TextBox 6"/>
+          <p:cNvSpPr txBox="1"/>
+          <p:nvPr/>
+        </p:nvSpPr>
+        <p:spPr>
+          <a:xfrm>
+            <a:off x="1337471" y="4218286"/>
+            <a:ext cx="8481293" cy="2585323"/>
+          </a:xfrm>
+          <a:prstGeom prst="rect">
+            <a:avLst/>
+          </a:prstGeom>
+          <a:noFill/>
+        </p:spPr>
+        <p:txBody>
+          <a:bodyPr wrap="square" rtlCol="0">
+            <a:spAutoFit/>
+          </a:bodyPr>
+          <a:lstStyle/>
+          <a:p>
+            <a:r>
+              <a:rPr lang="en-US" altLang="ko-KR" dirty="0" smtClean="0"/>
+              <a:t>[</a:t>
+            </a:r>
+            <a:r>
+              <a:rPr lang="en-US" altLang="ko-KR" dirty="0" err="1" smtClean="0"/>
+              <a:t>Dmem</a:t>
+            </a:r>
+            <a:r>
+              <a:rPr lang="en-US" altLang="ko-KR" dirty="0" smtClean="0"/>
+              <a:t>] (LB byte </a:t>
+            </a:r>
+            <a:r>
+              <a:rPr lang="ko-KR" altLang="en-US" dirty="0" smtClean="0"/>
+              <a:t>단위 </a:t>
+            </a:r>
+            <a:r>
+              <a:rPr lang="en-US" altLang="ko-KR" dirty="0" smtClean="0"/>
+              <a:t>signed read </a:t>
+            </a:r>
+            <a:r>
+              <a:rPr lang="ko-KR" altLang="en-US" dirty="0" smtClean="0"/>
+              <a:t>동작 확인</a:t>
+            </a:r>
+            <a:r>
+              <a:rPr lang="en-US" altLang="ko-KR" dirty="0" smtClean="0"/>
+              <a:t>)</a:t>
+            </a:r>
+          </a:p>
+          <a:p>
+            <a:endParaRPr lang="en-US" altLang="ko-KR" dirty="0" smtClean="0"/>
+          </a:p>
+          <a:p>
+            <a:pPr marL="342900" indent="-342900">
+              <a:buAutoNum type="arabicPeriod"/>
+            </a:pPr>
+            <a:r>
+              <a:rPr lang="en-US" altLang="ko-KR" dirty="0" err="1" smtClean="0"/>
+              <a:t>dmem</a:t>
+            </a:r>
+            <a:r>
+              <a:rPr lang="en-US" altLang="ko-KR" dirty="0" smtClean="0"/>
+              <a:t>[0+0] = 8’h01	</a:t>
+            </a:r>
+            <a:r>
+              <a:rPr lang="en-US" altLang="ko-KR" dirty="0" smtClean="0">
+                <a:sym typeface="Wingdings" panose="05000000000000000000" pitchFamily="2" charset="2"/>
+              </a:rPr>
+              <a:t>  32’b00_00_00_01</a:t>
+            </a:r>
+            <a:endParaRPr lang="en-US" altLang="ko-KR" dirty="0" smtClean="0"/>
+          </a:p>
+          <a:p>
+            <a:pPr marL="342900" indent="-342900">
+              <a:buFontTx/>
+              <a:buAutoNum type="arabicPeriod"/>
+            </a:pPr>
+            <a:r>
+              <a:rPr lang="en-US" altLang="ko-KR" dirty="0" err="1" smtClean="0"/>
+              <a:t>dmem</a:t>
+            </a:r>
+            <a:r>
+              <a:rPr lang="en-US" altLang="ko-KR" dirty="0" smtClean="0"/>
+              <a:t>[0+1] </a:t>
+            </a:r>
+            <a:r>
+              <a:rPr lang="en-US" altLang="ko-KR" dirty="0"/>
+              <a:t>= </a:t>
+            </a:r>
+            <a:r>
+              <a:rPr lang="en-US" altLang="ko-KR" dirty="0" smtClean="0"/>
+              <a:t>8’hf2</a:t>
+            </a:r>
+            <a:r>
+              <a:rPr lang="en-US" altLang="ko-KR" dirty="0"/>
+              <a:t>	</a:t>
+            </a:r>
+            <a:r>
+              <a:rPr lang="en-US" altLang="ko-KR" dirty="0">
+                <a:sym typeface="Wingdings" panose="05000000000000000000" pitchFamily="2" charset="2"/>
+              </a:rPr>
+              <a:t>  </a:t>
+            </a:r>
+            <a:r>
+              <a:rPr lang="en-US" altLang="ko-KR" dirty="0" smtClean="0">
+                <a:sym typeface="Wingdings" panose="05000000000000000000" pitchFamily="2" charset="2"/>
+              </a:rPr>
+              <a:t>32’bff_ff_ff_f2</a:t>
+            </a:r>
+            <a:endParaRPr lang="en-US" altLang="ko-KR" dirty="0"/>
+          </a:p>
+          <a:p>
+            <a:pPr marL="342900" indent="-342900">
+              <a:buFontTx/>
+              <a:buAutoNum type="arabicPeriod"/>
+            </a:pPr>
+            <a:r>
+              <a:rPr lang="en-US" altLang="ko-KR" dirty="0" err="1" smtClean="0"/>
+              <a:t>dmem</a:t>
+            </a:r>
+            <a:r>
+              <a:rPr lang="en-US" altLang="ko-KR" dirty="0" smtClean="0"/>
+              <a:t>[0+2] </a:t>
+            </a:r>
+            <a:r>
+              <a:rPr lang="en-US" altLang="ko-KR" dirty="0"/>
+              <a:t>= </a:t>
+            </a:r>
+            <a:r>
+              <a:rPr lang="en-US" altLang="ko-KR" dirty="0" smtClean="0"/>
+              <a:t>8’hf3</a:t>
+            </a:r>
+            <a:r>
+              <a:rPr lang="en-US" altLang="ko-KR" dirty="0"/>
+              <a:t>	</a:t>
+            </a:r>
+            <a:r>
+              <a:rPr lang="en-US" altLang="ko-KR" dirty="0">
+                <a:sym typeface="Wingdings" panose="05000000000000000000" pitchFamily="2" charset="2"/>
+              </a:rPr>
+              <a:t>  </a:t>
+            </a:r>
+            <a:r>
+              <a:rPr lang="en-US" altLang="ko-KR" dirty="0" smtClean="0">
+                <a:sym typeface="Wingdings" panose="05000000000000000000" pitchFamily="2" charset="2"/>
+              </a:rPr>
+              <a:t>32’bff_ff_ff_f3</a:t>
+            </a:r>
+            <a:endParaRPr lang="en-US" altLang="ko-KR" dirty="0"/>
+          </a:p>
+          <a:p>
+            <a:pPr marL="342900" indent="-342900">
+              <a:buFontTx/>
+              <a:buAutoNum type="arabicPeriod"/>
+            </a:pPr>
+            <a:r>
+              <a:rPr lang="en-US" altLang="ko-KR" dirty="0" err="1" smtClean="0"/>
+              <a:t>dmem</a:t>
+            </a:r>
+            <a:r>
+              <a:rPr lang="en-US" altLang="ko-KR" dirty="0" smtClean="0"/>
+              <a:t>[0+3] </a:t>
+            </a:r>
+            <a:r>
+              <a:rPr lang="en-US" altLang="ko-KR" dirty="0"/>
+              <a:t>= </a:t>
+            </a:r>
+            <a:r>
+              <a:rPr lang="en-US" altLang="ko-KR" dirty="0" smtClean="0"/>
+              <a:t>8’h04</a:t>
+            </a:r>
+            <a:r>
+              <a:rPr lang="en-US" altLang="ko-KR" dirty="0"/>
+              <a:t>	</a:t>
+            </a:r>
+            <a:r>
+              <a:rPr lang="en-US" altLang="ko-KR" dirty="0">
+                <a:sym typeface="Wingdings" panose="05000000000000000000" pitchFamily="2" charset="2"/>
+              </a:rPr>
+              <a:t>  </a:t>
+            </a:r>
+            <a:r>
+              <a:rPr lang="en-US" altLang="ko-KR" dirty="0" smtClean="0">
+                <a:sym typeface="Wingdings" panose="05000000000000000000" pitchFamily="2" charset="2"/>
+              </a:rPr>
+              <a:t>32’b00_00_00_04</a:t>
+            </a:r>
+          </a:p>
+          <a:p>
+            <a:pPr marL="342900" indent="-342900">
+              <a:buFontTx/>
+              <a:buAutoNum type="arabicPeriod"/>
+            </a:pPr>
+            <a:endParaRPr lang="en-US" altLang="ko-KR" dirty="0">
+              <a:sym typeface="Wingdings" panose="05000000000000000000" pitchFamily="2" charset="2"/>
+            </a:endParaRPr>
+          </a:p>
+          <a:p>
+            <a:r>
+              <a:rPr lang="en-US" altLang="ko-KR" dirty="0" smtClean="0"/>
+              <a:t>LB</a:t>
+            </a:r>
+            <a:r>
+              <a:rPr lang="ko-KR" altLang="en-US" dirty="0" smtClean="0"/>
+              <a:t>동작에서 </a:t>
+            </a:r>
+            <a:r>
+              <a:rPr lang="en-US" altLang="ko-KR" dirty="0" smtClean="0"/>
+              <a:t>byte</a:t>
+            </a:r>
+            <a:r>
+              <a:rPr lang="ko-KR" altLang="en-US" dirty="0" smtClean="0"/>
+              <a:t>단위 동작 확인</a:t>
+            </a:r>
+            <a:endParaRPr lang="en-US" altLang="ko-KR" dirty="0"/>
+          </a:p>
+          <a:p>
+            <a:r>
+              <a:rPr lang="ko-KR" altLang="en-US" dirty="0" smtClean="0"/>
+              <a:t>지정 </a:t>
+            </a:r>
+            <a:r>
+              <a:rPr lang="en-US" altLang="ko-KR" dirty="0" err="1" smtClean="0"/>
+              <a:t>byte_datad</a:t>
+            </a:r>
+            <a:r>
+              <a:rPr lang="ko-KR" altLang="en-US" dirty="0" smtClean="0"/>
+              <a:t>의 </a:t>
+            </a:r>
+            <a:r>
+              <a:rPr lang="en-US" altLang="ko-KR" dirty="0" smtClean="0"/>
+              <a:t>MSB</a:t>
+            </a:r>
+            <a:r>
+              <a:rPr lang="ko-KR" altLang="en-US" dirty="0" smtClean="0"/>
+              <a:t>에 맞추어 상위 비트</a:t>
+            </a:r>
+            <a:r>
+              <a:rPr lang="en-US" altLang="ko-KR" dirty="0" smtClean="0"/>
+              <a:t>[31:8]</a:t>
+            </a:r>
+            <a:r>
+              <a:rPr lang="ko-KR" altLang="en-US" dirty="0" smtClean="0"/>
+              <a:t>을 </a:t>
+            </a:r>
+            <a:r>
+              <a:rPr lang="en-US" altLang="ko-KR" dirty="0" smtClean="0"/>
+              <a:t>1</a:t>
+            </a:r>
+            <a:r>
+              <a:rPr lang="ko-KR" altLang="en-US" dirty="0" smtClean="0"/>
+              <a:t>로 채워 </a:t>
+            </a:r>
+            <a:r>
+              <a:rPr lang="en-US" altLang="ko-KR" dirty="0" smtClean="0"/>
+              <a:t>singed </a:t>
+            </a:r>
+            <a:r>
+              <a:rPr lang="ko-KR" altLang="en-US" dirty="0" smtClean="0"/>
+              <a:t>동작 확인</a:t>
+            </a:r>
+            <a:endParaRPr lang="en-US" altLang="ko-KR" dirty="0"/>
+          </a:p>
+        </p:txBody>
+      </p:sp>
+      <p:sp>
+        <p:nvSpPr>
+          <p:cNvPr id="8" name="TextBox 7"/>
+          <p:cNvSpPr txBox="1"/>
+          <p:nvPr/>
+        </p:nvSpPr>
+        <p:spPr>
+          <a:xfrm>
+            <a:off x="1954924" y="2665296"/>
+            <a:ext cx="1282089" cy="246221"/>
+          </a:xfrm>
+          <a:prstGeom prst="rect">
+            <a:avLst/>
+          </a:prstGeom>
+          <a:solidFill>
+            <a:schemeClr val="bg1"/>
+          </a:solidFill>
+          <a:ln>
+            <a:solidFill>
+              <a:schemeClr val="tx1"/>
+            </a:solidFill>
+          </a:ln>
+        </p:spPr>
+        <p:txBody>
+          <a:bodyPr wrap="square" rtlCol="0">
+            <a:spAutoFit/>
+          </a:bodyPr>
+          <a:lstStyle/>
+          <a:p>
+            <a:pPr algn="ctr"/>
+            <a:r>
+              <a:rPr lang="en-US" altLang="ko-KR" sz="1000" dirty="0" smtClean="0"/>
+              <a:t>0 = read</a:t>
+            </a:r>
+            <a:endParaRPr lang="ko-KR" altLang="en-US" sz="1000" dirty="0"/>
+          </a:p>
+        </p:txBody>
+      </p:sp>
+      <p:sp>
+        <p:nvSpPr>
+          <p:cNvPr id="9" name="TextBox 8"/>
+          <p:cNvSpPr txBox="1"/>
+          <p:nvPr/>
+        </p:nvSpPr>
+        <p:spPr>
+          <a:xfrm>
+            <a:off x="1954925" y="3896957"/>
+            <a:ext cx="1282089" cy="246221"/>
+          </a:xfrm>
+          <a:prstGeom prst="rect">
+            <a:avLst/>
+          </a:prstGeom>
+          <a:solidFill>
+            <a:schemeClr val="bg1"/>
+          </a:solidFill>
+          <a:ln>
+            <a:solidFill>
+              <a:schemeClr val="tx1"/>
+            </a:solidFill>
+          </a:ln>
+        </p:spPr>
+        <p:txBody>
+          <a:bodyPr wrap="square" rtlCol="0">
+            <a:spAutoFit/>
+          </a:bodyPr>
+          <a:lstStyle/>
+          <a:p>
+            <a:pPr algn="ctr"/>
+            <a:r>
+              <a:rPr lang="en-US" altLang="ko-KR" sz="1000" dirty="0" smtClean="0"/>
+              <a:t>[0] = 04_f3_f2_01</a:t>
+            </a:r>
+            <a:endParaRPr lang="ko-KR" altLang="en-US" sz="1000" dirty="0"/>
+          </a:p>
+        </p:txBody>
+      </p:sp>
+      <p:sp>
+        <p:nvSpPr>
+          <p:cNvPr id="10" name="TextBox 9"/>
+          <p:cNvSpPr txBox="1"/>
+          <p:nvPr/>
+        </p:nvSpPr>
+        <p:spPr>
+          <a:xfrm>
+            <a:off x="1954925" y="2407535"/>
+            <a:ext cx="1282088" cy="246221"/>
+          </a:xfrm>
+          <a:prstGeom prst="rect">
+            <a:avLst/>
+          </a:prstGeom>
+          <a:solidFill>
+            <a:schemeClr val="bg1"/>
+          </a:solidFill>
+          <a:ln>
+            <a:solidFill>
+              <a:schemeClr val="tx1"/>
+            </a:solidFill>
+          </a:ln>
+        </p:spPr>
+        <p:txBody>
+          <a:bodyPr wrap="square" rtlCol="0">
+            <a:spAutoFit/>
+          </a:bodyPr>
+          <a:lstStyle/>
+          <a:p>
+            <a:pPr algn="ctr"/>
+            <a:r>
+              <a:rPr lang="en-US" altLang="ko-KR" sz="1000" smtClean="0"/>
+              <a:t>LB </a:t>
+            </a:r>
+            <a:r>
+              <a:rPr lang="ko-KR" altLang="en-US" sz="1000" dirty="0" smtClean="0"/>
+              <a:t>동작</a:t>
+            </a:r>
+            <a:endParaRPr lang="ko-KR" altLang="en-US" sz="1000" dirty="0"/>
+          </a:p>
+        </p:txBody>
+      </p:sp>
+      <p:sp>
+        <p:nvSpPr>
+          <p:cNvPr id="13" name="TextBox 12"/>
+          <p:cNvSpPr txBox="1"/>
+          <p:nvPr/>
+        </p:nvSpPr>
+        <p:spPr>
+          <a:xfrm>
+            <a:off x="1954924" y="2923057"/>
+            <a:ext cx="1282089" cy="246221"/>
+          </a:xfrm>
+          <a:prstGeom prst="rect">
+            <a:avLst/>
+          </a:prstGeom>
+          <a:solidFill>
+            <a:schemeClr val="bg1"/>
+          </a:solidFill>
+          <a:ln>
+            <a:solidFill>
+              <a:schemeClr val="tx1"/>
+            </a:solidFill>
+          </a:ln>
+        </p:spPr>
+        <p:txBody>
+          <a:bodyPr wrap="square" rtlCol="0">
+            <a:spAutoFit/>
+          </a:bodyPr>
+          <a:lstStyle/>
+          <a:p>
+            <a:pPr algn="ctr"/>
+            <a:r>
+              <a:rPr lang="en-US" altLang="ko-KR" sz="1000" dirty="0" smtClean="0"/>
+              <a:t>0~3 </a:t>
+            </a:r>
+            <a:r>
+              <a:rPr lang="ko-KR" altLang="en-US" sz="1000" dirty="0" smtClean="0"/>
+              <a:t>순차 </a:t>
+            </a:r>
+            <a:r>
+              <a:rPr lang="en-US" altLang="ko-KR" sz="1000" dirty="0" smtClean="0"/>
+              <a:t>address</a:t>
+            </a:r>
+            <a:endParaRPr lang="ko-KR" altLang="en-US" sz="1000" dirty="0"/>
+          </a:p>
+        </p:txBody>
+      </p:sp>
+      <p:sp>
+        <p:nvSpPr>
+          <p:cNvPr id="14" name="TextBox 13"/>
+          <p:cNvSpPr txBox="1"/>
+          <p:nvPr/>
+        </p:nvSpPr>
+        <p:spPr>
+          <a:xfrm>
+            <a:off x="1954924" y="3558992"/>
+            <a:ext cx="1282089" cy="246221"/>
+          </a:xfrm>
+          <a:prstGeom prst="rect">
+            <a:avLst/>
+          </a:prstGeom>
+          <a:solidFill>
+            <a:schemeClr val="bg1"/>
+          </a:solidFill>
+          <a:ln>
+            <a:solidFill>
+              <a:schemeClr val="tx1"/>
+            </a:solidFill>
+          </a:ln>
+        </p:spPr>
+        <p:txBody>
+          <a:bodyPr wrap="square" rtlCol="0">
+            <a:spAutoFit/>
+          </a:bodyPr>
+          <a:lstStyle/>
+          <a:p>
+            <a:pPr algn="ctr"/>
+            <a:r>
+              <a:rPr lang="en-US" altLang="ko-KR" sz="1000" dirty="0" smtClean="0"/>
+              <a:t>read data</a:t>
+            </a:r>
+            <a:endParaRPr lang="ko-KR" altLang="en-US" sz="1000" dirty="0"/>
+          </a:p>
+        </p:txBody>
+      </p:sp>
+    </p:spTree>
+    <p:extLst>
+      <p:ext uri="{BB962C8B-B14F-4D97-AF65-F5344CB8AC3E}">
+        <p14:creationId xmlns:p14="http://schemas.microsoft.com/office/powerpoint/2010/main" val="159299166"/>
+      </p:ext>
+    </p:extLst>
+  </p:cSld>
+  <p:clrMapOvr>
+    <a:masterClrMapping/>
+  </p:clrMapOvr>
+</p:sld>
+</file>
+
+<file path=ppt/slides/slide13.xml><?xml version="1.0" encoding="utf-8"?>
+<p:sld xmlns:a="http://schemas.openxmlformats.org/drawingml/2006/main" xmlns:r="http://schemas.openxmlformats.org/officeDocument/2006/relationships" xmlns:p="http://schemas.openxmlformats.org/presentationml/2006/main">
+  <p:cSld>
+    <p:spTree>
+      <p:nvGrpSpPr>
+        <p:cNvPr id="1" name=""/>
+        <p:cNvGrpSpPr/>
+        <p:nvPr/>
+      </p:nvGrpSpPr>
+      <p:grpSpPr>
+        <a:xfrm>
+          <a:off x="0" y="0"/>
+          <a:ext cx="0" cy="0"/>
+          <a:chOff x="0" y="0"/>
+          <a:chExt cx="0" cy="0"/>
+        </a:xfrm>
+      </p:grpSpPr>
+      <p:pic>
+        <p:nvPicPr>
+          <p:cNvPr id="3" name="그림 2"/>
+          <p:cNvPicPr>
+            <a:picLocks noChangeAspect="1"/>
+          </p:cNvPicPr>
+          <p:nvPr/>
+        </p:nvPicPr>
+        <p:blipFill>
+          <a:blip r:embed="rId2"/>
+          <a:stretch>
+            <a:fillRect/>
+          </a:stretch>
+        </p:blipFill>
+        <p:spPr>
+          <a:xfrm>
+            <a:off x="0" y="1639432"/>
+            <a:ext cx="12192000" cy="2503746"/>
+          </a:xfrm>
+          <a:prstGeom prst="rect">
+            <a:avLst/>
+          </a:prstGeom>
+        </p:spPr>
+      </p:pic>
+      <p:sp>
+        <p:nvSpPr>
+          <p:cNvPr id="2" name="제목 1">
+            <a:extLst>
+              <a:ext uri="{FF2B5EF4-FFF2-40B4-BE49-F238E27FC236}">
+                <a16:creationId xmlns:a16="http://schemas.microsoft.com/office/drawing/2014/main" id="{5369339E-B86D-2B71-0C11-9485EFA2EB1F}"/>
+              </a:ext>
+            </a:extLst>
+          </p:cNvPr>
+          <p:cNvSpPr>
+            <a:spLocks noGrp="1"/>
+          </p:cNvSpPr>
+          <p:nvPr>
+            <p:ph type="title"/>
+          </p:nvPr>
+        </p:nvSpPr>
+        <p:spPr/>
+        <p:txBody>
+          <a:bodyPr/>
+          <a:lstStyle/>
+          <a:p>
+            <a:r>
+              <a:rPr lang="en-US" altLang="ko-KR" dirty="0"/>
+              <a:t>4</a:t>
+            </a:r>
+            <a:r>
+              <a:rPr lang="en-US" altLang="ko-KR" dirty="0" smtClean="0"/>
+              <a:t>. IL-type simulation</a:t>
+            </a:r>
+            <a:endParaRPr lang="ko-KR" altLang="en-US" dirty="0"/>
+          </a:p>
+        </p:txBody>
+      </p:sp>
+      <p:sp>
+        <p:nvSpPr>
+          <p:cNvPr id="6" name="TextBox 5"/>
+          <p:cNvSpPr txBox="1"/>
+          <p:nvPr/>
+        </p:nvSpPr>
+        <p:spPr>
+          <a:xfrm>
+            <a:off x="7240555" y="4640424"/>
+            <a:ext cx="597159" cy="369332"/>
+          </a:xfrm>
+          <a:prstGeom prst="rect">
+            <a:avLst/>
+          </a:prstGeom>
+          <a:noFill/>
+        </p:spPr>
+        <p:txBody>
+          <a:bodyPr wrap="square" rtlCol="0">
+            <a:spAutoFit/>
+          </a:bodyPr>
+          <a:lstStyle/>
+          <a:p>
+            <a:r>
+              <a:rPr lang="en-US" altLang="ko-KR" dirty="0" smtClean="0">
+                <a:solidFill>
+                  <a:schemeClr val="bg1"/>
+                </a:solidFill>
+              </a:rPr>
+              <a:t>0</a:t>
+            </a:r>
+            <a:endParaRPr lang="ko-KR" altLang="en-US" dirty="0">
+              <a:solidFill>
+                <a:schemeClr val="bg1"/>
+              </a:solidFill>
+            </a:endParaRPr>
+          </a:p>
+        </p:txBody>
+      </p:sp>
+      <p:sp>
+        <p:nvSpPr>
+          <p:cNvPr id="7" name="TextBox 6"/>
+          <p:cNvSpPr txBox="1"/>
+          <p:nvPr/>
+        </p:nvSpPr>
+        <p:spPr>
+          <a:xfrm>
+            <a:off x="1337471" y="4218286"/>
+            <a:ext cx="8481293" cy="2585323"/>
+          </a:xfrm>
+          <a:prstGeom prst="rect">
+            <a:avLst/>
+          </a:prstGeom>
+          <a:noFill/>
+        </p:spPr>
+        <p:txBody>
+          <a:bodyPr wrap="square" rtlCol="0">
+            <a:spAutoFit/>
+          </a:bodyPr>
+          <a:lstStyle/>
+          <a:p>
+            <a:r>
+              <a:rPr lang="en-US" altLang="ko-KR" dirty="0" smtClean="0"/>
+              <a:t>[</a:t>
+            </a:r>
+            <a:r>
+              <a:rPr lang="en-US" altLang="ko-KR" dirty="0" err="1" smtClean="0"/>
+              <a:t>Dmem</a:t>
+            </a:r>
+            <a:r>
+              <a:rPr lang="en-US" altLang="ko-KR" dirty="0" smtClean="0"/>
+              <a:t>] (LH byte </a:t>
+            </a:r>
+            <a:r>
+              <a:rPr lang="ko-KR" altLang="en-US" dirty="0" smtClean="0"/>
+              <a:t>단위 </a:t>
+            </a:r>
+            <a:r>
+              <a:rPr lang="en-US" altLang="ko-KR" dirty="0" smtClean="0"/>
+              <a:t>signed read </a:t>
+            </a:r>
+            <a:r>
+              <a:rPr lang="ko-KR" altLang="en-US" dirty="0" smtClean="0"/>
+              <a:t>동작 확인</a:t>
+            </a:r>
+            <a:r>
+              <a:rPr lang="en-US" altLang="ko-KR" dirty="0" smtClean="0"/>
+              <a:t>)</a:t>
+            </a:r>
+          </a:p>
+          <a:p>
+            <a:endParaRPr lang="en-US" altLang="ko-KR" dirty="0" smtClean="0"/>
+          </a:p>
+          <a:p>
+            <a:pPr marL="342900" indent="-342900">
+              <a:buAutoNum type="arabicPeriod"/>
+            </a:pPr>
+            <a:r>
+              <a:rPr lang="en-US" altLang="ko-KR" dirty="0" err="1" smtClean="0"/>
+              <a:t>dmem</a:t>
+            </a:r>
+            <a:r>
+              <a:rPr lang="en-US" altLang="ko-KR" dirty="0" smtClean="0"/>
+              <a:t>[0+0] = 16’hf2_01	</a:t>
+            </a:r>
+            <a:r>
+              <a:rPr lang="en-US" altLang="ko-KR" dirty="0" smtClean="0">
+                <a:sym typeface="Wingdings" panose="05000000000000000000" pitchFamily="2" charset="2"/>
+              </a:rPr>
+              <a:t>  32’bff_ff_f2_01</a:t>
+            </a:r>
+            <a:endParaRPr lang="en-US" altLang="ko-KR" dirty="0" smtClean="0"/>
+          </a:p>
+          <a:p>
+            <a:pPr marL="342900" indent="-342900">
+              <a:buFontTx/>
+              <a:buAutoNum type="arabicPeriod"/>
+            </a:pPr>
+            <a:r>
+              <a:rPr lang="en-US" altLang="ko-KR" dirty="0" err="1" smtClean="0"/>
+              <a:t>dmem</a:t>
+            </a:r>
+            <a:r>
+              <a:rPr lang="en-US" altLang="ko-KR" dirty="0" smtClean="0"/>
+              <a:t>[0+1] </a:t>
+            </a:r>
+            <a:r>
+              <a:rPr lang="en-US" altLang="ko-KR" dirty="0"/>
+              <a:t>= </a:t>
+            </a:r>
+            <a:r>
+              <a:rPr lang="en-US" altLang="ko-KR" dirty="0" smtClean="0"/>
+              <a:t>16’hf2_01</a:t>
+            </a:r>
+            <a:r>
+              <a:rPr lang="en-US" altLang="ko-KR" dirty="0"/>
+              <a:t>	</a:t>
+            </a:r>
+            <a:r>
+              <a:rPr lang="en-US" altLang="ko-KR" dirty="0">
+                <a:sym typeface="Wingdings" panose="05000000000000000000" pitchFamily="2" charset="2"/>
+              </a:rPr>
+              <a:t>  </a:t>
+            </a:r>
+            <a:r>
+              <a:rPr lang="en-US" altLang="ko-KR" dirty="0" smtClean="0">
+                <a:sym typeface="Wingdings" panose="05000000000000000000" pitchFamily="2" charset="2"/>
+              </a:rPr>
+              <a:t>32’bff_ff_f2_01</a:t>
+            </a:r>
+            <a:endParaRPr lang="en-US" altLang="ko-KR" dirty="0"/>
+          </a:p>
+          <a:p>
+            <a:pPr marL="342900" indent="-342900">
+              <a:buFontTx/>
+              <a:buAutoNum type="arabicPeriod"/>
+            </a:pPr>
+            <a:r>
+              <a:rPr lang="en-US" altLang="ko-KR" dirty="0" err="1" smtClean="0"/>
+              <a:t>dmem</a:t>
+            </a:r>
+            <a:r>
+              <a:rPr lang="en-US" altLang="ko-KR" dirty="0" smtClean="0"/>
+              <a:t>[0+2] </a:t>
+            </a:r>
+            <a:r>
+              <a:rPr lang="en-US" altLang="ko-KR" dirty="0"/>
+              <a:t>= </a:t>
+            </a:r>
+            <a:r>
+              <a:rPr lang="en-US" altLang="ko-KR" dirty="0" smtClean="0"/>
+              <a:t>16’h04_f3</a:t>
+            </a:r>
+            <a:r>
+              <a:rPr lang="en-US" altLang="ko-KR" dirty="0"/>
+              <a:t>	</a:t>
+            </a:r>
+            <a:r>
+              <a:rPr lang="en-US" altLang="ko-KR" dirty="0">
+                <a:sym typeface="Wingdings" panose="05000000000000000000" pitchFamily="2" charset="2"/>
+              </a:rPr>
+              <a:t>  </a:t>
+            </a:r>
+            <a:r>
+              <a:rPr lang="en-US" altLang="ko-KR" dirty="0" smtClean="0">
+                <a:sym typeface="Wingdings" panose="05000000000000000000" pitchFamily="2" charset="2"/>
+              </a:rPr>
+              <a:t>32’b00_00_04_f3</a:t>
+            </a:r>
+            <a:endParaRPr lang="en-US" altLang="ko-KR" dirty="0"/>
+          </a:p>
+          <a:p>
+            <a:pPr marL="342900" indent="-342900">
+              <a:buFontTx/>
+              <a:buAutoNum type="arabicPeriod"/>
+            </a:pPr>
+            <a:r>
+              <a:rPr lang="en-US" altLang="ko-KR" dirty="0" err="1" smtClean="0"/>
+              <a:t>dmem</a:t>
+            </a:r>
+            <a:r>
+              <a:rPr lang="en-US" altLang="ko-KR" dirty="0" smtClean="0"/>
+              <a:t>[0+3] </a:t>
+            </a:r>
+            <a:r>
+              <a:rPr lang="en-US" altLang="ko-KR" dirty="0"/>
+              <a:t>= </a:t>
+            </a:r>
+            <a:r>
+              <a:rPr lang="en-US" altLang="ko-KR" dirty="0" smtClean="0"/>
+              <a:t>16’h04_f3</a:t>
+            </a:r>
+            <a:r>
+              <a:rPr lang="en-US" altLang="ko-KR" dirty="0"/>
+              <a:t>	</a:t>
+            </a:r>
+            <a:r>
+              <a:rPr lang="en-US" altLang="ko-KR">
+                <a:sym typeface="Wingdings" panose="05000000000000000000" pitchFamily="2" charset="2"/>
+              </a:rPr>
+              <a:t>  </a:t>
+            </a:r>
+            <a:r>
+              <a:rPr lang="en-US" altLang="ko-KR" smtClean="0">
+                <a:sym typeface="Wingdings" panose="05000000000000000000" pitchFamily="2" charset="2"/>
+              </a:rPr>
+              <a:t>32’b00_00_04_f3</a:t>
+            </a:r>
+            <a:endParaRPr lang="en-US" altLang="ko-KR" dirty="0" smtClean="0">
+              <a:sym typeface="Wingdings" panose="05000000000000000000" pitchFamily="2" charset="2"/>
+            </a:endParaRPr>
+          </a:p>
+          <a:p>
+            <a:pPr marL="342900" indent="-342900">
+              <a:buFontTx/>
+              <a:buAutoNum type="arabicPeriod"/>
+            </a:pPr>
+            <a:endParaRPr lang="en-US" altLang="ko-KR" dirty="0">
+              <a:sym typeface="Wingdings" panose="05000000000000000000" pitchFamily="2" charset="2"/>
+            </a:endParaRPr>
+          </a:p>
+          <a:p>
+            <a:r>
+              <a:rPr lang="en-US" altLang="ko-KR" dirty="0" smtClean="0"/>
+              <a:t>LB</a:t>
+            </a:r>
+            <a:r>
+              <a:rPr lang="ko-KR" altLang="en-US" dirty="0" smtClean="0"/>
+              <a:t>동작에서 </a:t>
+            </a:r>
+            <a:r>
+              <a:rPr lang="en-US" altLang="ko-KR" dirty="0" smtClean="0"/>
+              <a:t>byte</a:t>
+            </a:r>
+            <a:r>
+              <a:rPr lang="ko-KR" altLang="en-US" dirty="0" smtClean="0"/>
+              <a:t>단위 동작 확인</a:t>
+            </a:r>
+            <a:endParaRPr lang="en-US" altLang="ko-KR" dirty="0"/>
+          </a:p>
+          <a:p>
+            <a:r>
+              <a:rPr lang="ko-KR" altLang="en-US" dirty="0" smtClean="0"/>
+              <a:t>지정 </a:t>
+            </a:r>
+            <a:r>
+              <a:rPr lang="en-US" altLang="ko-KR" dirty="0" err="1" smtClean="0"/>
+              <a:t>byte_datad</a:t>
+            </a:r>
+            <a:r>
+              <a:rPr lang="ko-KR" altLang="en-US" dirty="0" smtClean="0"/>
+              <a:t>의 </a:t>
+            </a:r>
+            <a:r>
+              <a:rPr lang="en-US" altLang="ko-KR" dirty="0" smtClean="0"/>
+              <a:t>MSB</a:t>
+            </a:r>
+            <a:r>
+              <a:rPr lang="ko-KR" altLang="en-US" dirty="0" smtClean="0"/>
+              <a:t>에 맞추어 상위 비트</a:t>
+            </a:r>
+            <a:r>
+              <a:rPr lang="en-US" altLang="ko-KR" dirty="0" smtClean="0"/>
+              <a:t>[31:8]</a:t>
+            </a:r>
+            <a:r>
+              <a:rPr lang="ko-KR" altLang="en-US" dirty="0" smtClean="0"/>
+              <a:t>을 </a:t>
+            </a:r>
+            <a:r>
+              <a:rPr lang="en-US" altLang="ko-KR" dirty="0" smtClean="0"/>
+              <a:t>1</a:t>
+            </a:r>
+            <a:r>
+              <a:rPr lang="ko-KR" altLang="en-US" dirty="0" smtClean="0"/>
+              <a:t>로 채워 </a:t>
+            </a:r>
+            <a:r>
+              <a:rPr lang="en-US" altLang="ko-KR" dirty="0" smtClean="0"/>
+              <a:t>singed </a:t>
+            </a:r>
+            <a:r>
+              <a:rPr lang="ko-KR" altLang="en-US" dirty="0" smtClean="0"/>
+              <a:t>동작 확인</a:t>
+            </a:r>
+            <a:endParaRPr lang="en-US" altLang="ko-KR" dirty="0"/>
+          </a:p>
+        </p:txBody>
+      </p:sp>
+      <p:sp>
+        <p:nvSpPr>
+          <p:cNvPr id="8" name="TextBox 7"/>
+          <p:cNvSpPr txBox="1"/>
+          <p:nvPr/>
+        </p:nvSpPr>
+        <p:spPr>
+          <a:xfrm>
+            <a:off x="1954924" y="2601728"/>
+            <a:ext cx="1282089" cy="246221"/>
+          </a:xfrm>
+          <a:prstGeom prst="rect">
+            <a:avLst/>
+          </a:prstGeom>
+          <a:solidFill>
+            <a:schemeClr val="bg1"/>
+          </a:solidFill>
+          <a:ln>
+            <a:solidFill>
+              <a:schemeClr val="tx1"/>
+            </a:solidFill>
+          </a:ln>
+        </p:spPr>
+        <p:txBody>
+          <a:bodyPr wrap="square" rtlCol="0">
+            <a:spAutoFit/>
+          </a:bodyPr>
+          <a:lstStyle/>
+          <a:p>
+            <a:pPr algn="ctr"/>
+            <a:r>
+              <a:rPr lang="en-US" altLang="ko-KR" sz="1000" dirty="0" smtClean="0"/>
+              <a:t>0 = read</a:t>
+            </a:r>
+            <a:endParaRPr lang="ko-KR" altLang="en-US" sz="1000" dirty="0"/>
+          </a:p>
+        </p:txBody>
+      </p:sp>
+      <p:sp>
+        <p:nvSpPr>
+          <p:cNvPr id="9" name="TextBox 8"/>
+          <p:cNvSpPr txBox="1"/>
+          <p:nvPr/>
+        </p:nvSpPr>
+        <p:spPr>
+          <a:xfrm>
+            <a:off x="1954925" y="3896957"/>
+            <a:ext cx="1282089" cy="246221"/>
+          </a:xfrm>
+          <a:prstGeom prst="rect">
+            <a:avLst/>
+          </a:prstGeom>
+          <a:solidFill>
+            <a:schemeClr val="bg1"/>
+          </a:solidFill>
+          <a:ln>
+            <a:solidFill>
+              <a:schemeClr val="tx1"/>
+            </a:solidFill>
+          </a:ln>
+        </p:spPr>
+        <p:txBody>
+          <a:bodyPr wrap="square" rtlCol="0">
+            <a:spAutoFit/>
+          </a:bodyPr>
+          <a:lstStyle/>
+          <a:p>
+            <a:pPr algn="ctr"/>
+            <a:r>
+              <a:rPr lang="en-US" altLang="ko-KR" sz="1000" dirty="0" smtClean="0"/>
+              <a:t>[0] = 04_f3_f2_01</a:t>
+            </a:r>
+            <a:endParaRPr lang="ko-KR" altLang="en-US" sz="1000" dirty="0"/>
+          </a:p>
+        </p:txBody>
+      </p:sp>
+      <p:sp>
+        <p:nvSpPr>
+          <p:cNvPr id="10" name="TextBox 9"/>
+          <p:cNvSpPr txBox="1"/>
+          <p:nvPr/>
+        </p:nvSpPr>
+        <p:spPr>
+          <a:xfrm>
+            <a:off x="1954924" y="2258411"/>
+            <a:ext cx="1282088" cy="246221"/>
+          </a:xfrm>
+          <a:prstGeom prst="rect">
+            <a:avLst/>
+          </a:prstGeom>
+          <a:solidFill>
+            <a:schemeClr val="bg1"/>
+          </a:solidFill>
+          <a:ln>
+            <a:solidFill>
+              <a:schemeClr val="tx1"/>
+            </a:solidFill>
+          </a:ln>
+        </p:spPr>
+        <p:txBody>
+          <a:bodyPr wrap="square" rtlCol="0">
+            <a:spAutoFit/>
+          </a:bodyPr>
+          <a:lstStyle/>
+          <a:p>
+            <a:pPr algn="ctr"/>
+            <a:r>
+              <a:rPr lang="en-US" altLang="ko-KR" sz="1000" dirty="0" smtClean="0"/>
+              <a:t>LH </a:t>
+            </a:r>
+            <a:r>
+              <a:rPr lang="ko-KR" altLang="en-US" sz="1000" dirty="0" smtClean="0"/>
+              <a:t>동작</a:t>
+            </a:r>
+            <a:endParaRPr lang="ko-KR" altLang="en-US" sz="1000" dirty="0"/>
+          </a:p>
+        </p:txBody>
+      </p:sp>
+      <p:sp>
+        <p:nvSpPr>
+          <p:cNvPr id="13" name="TextBox 12"/>
+          <p:cNvSpPr txBox="1"/>
+          <p:nvPr/>
+        </p:nvSpPr>
+        <p:spPr>
+          <a:xfrm>
+            <a:off x="1954924" y="2900773"/>
+            <a:ext cx="1282089" cy="246221"/>
+          </a:xfrm>
+          <a:prstGeom prst="rect">
+            <a:avLst/>
+          </a:prstGeom>
+          <a:solidFill>
+            <a:schemeClr val="bg1"/>
+          </a:solidFill>
+          <a:ln>
+            <a:solidFill>
+              <a:schemeClr val="tx1"/>
+            </a:solidFill>
+          </a:ln>
+        </p:spPr>
+        <p:txBody>
+          <a:bodyPr wrap="square" rtlCol="0">
+            <a:spAutoFit/>
+          </a:bodyPr>
+          <a:lstStyle/>
+          <a:p>
+            <a:pPr algn="ctr"/>
+            <a:r>
+              <a:rPr lang="en-US" altLang="ko-KR" sz="1000" dirty="0" smtClean="0"/>
+              <a:t>0~3 </a:t>
+            </a:r>
+            <a:r>
+              <a:rPr lang="ko-KR" altLang="en-US" sz="1000" dirty="0" smtClean="0"/>
+              <a:t>순차 </a:t>
+            </a:r>
+            <a:r>
+              <a:rPr lang="en-US" altLang="ko-KR" sz="1000" dirty="0" smtClean="0"/>
+              <a:t>address</a:t>
+            </a:r>
+            <a:endParaRPr lang="ko-KR" altLang="en-US" sz="1000" dirty="0"/>
+          </a:p>
+        </p:txBody>
+      </p:sp>
+      <p:sp>
+        <p:nvSpPr>
+          <p:cNvPr id="14" name="TextBox 13"/>
+          <p:cNvSpPr txBox="1"/>
+          <p:nvPr/>
+        </p:nvSpPr>
+        <p:spPr>
+          <a:xfrm>
+            <a:off x="1954924" y="3558992"/>
+            <a:ext cx="1282089" cy="246221"/>
+          </a:xfrm>
+          <a:prstGeom prst="rect">
+            <a:avLst/>
+          </a:prstGeom>
+          <a:solidFill>
+            <a:schemeClr val="bg1"/>
+          </a:solidFill>
+          <a:ln>
+            <a:solidFill>
+              <a:schemeClr val="tx1"/>
+            </a:solidFill>
+          </a:ln>
+        </p:spPr>
+        <p:txBody>
+          <a:bodyPr wrap="square" rtlCol="0">
+            <a:spAutoFit/>
+          </a:bodyPr>
+          <a:lstStyle/>
+          <a:p>
+            <a:pPr algn="ctr"/>
+            <a:r>
+              <a:rPr lang="en-US" altLang="ko-KR" sz="1000" dirty="0" smtClean="0"/>
+              <a:t>read data</a:t>
+            </a:r>
+            <a:endParaRPr lang="ko-KR" altLang="en-US" sz="1000" dirty="0"/>
+          </a:p>
+        </p:txBody>
+      </p:sp>
+    </p:spTree>
+    <p:extLst>
+      <p:ext uri="{BB962C8B-B14F-4D97-AF65-F5344CB8AC3E}">
+        <p14:creationId xmlns:p14="http://schemas.microsoft.com/office/powerpoint/2010/main" val="3131646105"/>
+      </p:ext>
+    </p:extLst>
+  </p:cSld>
+  <p:clrMapOvr>
+    <a:masterClrMapping/>
+  </p:clrMapOvr>
+</p:sld>
+</file>
+
+<file path=ppt/slides/slide14.xml><?xml version="1.0" encoding="utf-8"?>
+<p:sld xmlns:a="http://schemas.openxmlformats.org/drawingml/2006/main" xmlns:r="http://schemas.openxmlformats.org/officeDocument/2006/relationships" xmlns:p="http://schemas.openxmlformats.org/presentationml/2006/main">
+  <p:cSld>
+    <p:spTree>
+      <p:nvGrpSpPr>
+        <p:cNvPr id="1" name=""/>
+        <p:cNvGrpSpPr/>
+        <p:nvPr/>
+      </p:nvGrpSpPr>
+      <p:grpSpPr>
+        <a:xfrm>
+          <a:off x="0" y="0"/>
+          <a:ext cx="0" cy="0"/>
+          <a:chOff x="0" y="0"/>
+          <a:chExt cx="0" cy="0"/>
+        </a:xfrm>
+      </p:grpSpPr>
+      <p:sp>
+        <p:nvSpPr>
+          <p:cNvPr id="2" name="제목 1">
+            <a:extLst>
+              <a:ext uri="{FF2B5EF4-FFF2-40B4-BE49-F238E27FC236}">
+                <a16:creationId xmlns:a16="http://schemas.microsoft.com/office/drawing/2014/main" id="{5369339E-B86D-2B71-0C11-9485EFA2EB1F}"/>
+              </a:ext>
+            </a:extLst>
+          </p:cNvPr>
+          <p:cNvSpPr>
+            <a:spLocks noGrp="1"/>
+          </p:cNvSpPr>
+          <p:nvPr>
+            <p:ph type="title"/>
+          </p:nvPr>
+        </p:nvSpPr>
+        <p:spPr/>
+        <p:txBody>
+          <a:bodyPr/>
+          <a:lstStyle/>
+          <a:p>
+            <a:r>
+              <a:rPr lang="en-US" altLang="ko-KR" dirty="0"/>
               <a:t>5</a:t>
             </a:r>
             <a:r>
               <a:rPr lang="en-US" altLang="ko-KR" dirty="0" smtClean="0"/>
-              <a:t>. I</a:t>
-            </a:r>
-            <a:r>
-              <a:rPr lang="en-US" altLang="ko-KR" dirty="0" smtClean="0"/>
-              <a:t>-type</a:t>
+              <a:t>. I-type</a:t>
             </a:r>
             <a:endParaRPr lang="ko-KR" altLang="en-US" dirty="0"/>
           </a:p>
@@ -6014,7 +7656,7 @@
 </p:sld>
 </file>
 
-<file path=ppt/slides/slide13.xml><?xml version="1.0" encoding="utf-8"?>
+<file path=ppt/slides/slide15.xml><?xml version="1.0" encoding="utf-8"?>
 <p:sld xmlns:a="http://schemas.openxmlformats.org/drawingml/2006/main" xmlns:r="http://schemas.openxmlformats.org/officeDocument/2006/relationships" xmlns:p="http://schemas.openxmlformats.org/presentationml/2006/main">
   <p:cSld>
     <p:spTree>
@@ -6058,11 +7700,7 @@
             </a:r>
             <a:r>
               <a:rPr lang="en-US" altLang="ko-KR" dirty="0" smtClean="0"/>
-              <a:t>. IL</a:t>
-            </a:r>
-            <a:r>
-              <a:rPr lang="en-US" altLang="ko-KR" dirty="0" smtClean="0"/>
-              <a:t>-type</a:t>
+              <a:t>. IL-type</a:t>
             </a:r>
             <a:endParaRPr lang="ko-KR" altLang="en-US" dirty="0"/>
           </a:p>
@@ -6208,11 +7846,7 @@
             </a:r>
             <a:r>
               <a:rPr lang="en-US" altLang="ko-KR" dirty="0" smtClean="0"/>
-              <a:t>. S</a:t>
-            </a:r>
-            <a:r>
-              <a:rPr lang="en-US" altLang="ko-KR" dirty="0" smtClean="0"/>
-              <a:t>-type</a:t>
+              <a:t>. S-type</a:t>
             </a:r>
             <a:endParaRPr lang="ko-KR" altLang="en-US" dirty="0"/>
           </a:p>
@@ -7342,11 +8976,7 @@
             </a:r>
             <a:r>
               <a:rPr lang="en-US" altLang="ko-KR" dirty="0" smtClean="0"/>
-              <a:t>. S</a:t>
-            </a:r>
-            <a:r>
-              <a:rPr lang="en-US" altLang="ko-KR" dirty="0" smtClean="0"/>
-              <a:t>-type</a:t>
+              <a:t>. S-type</a:t>
             </a:r>
             <a:endParaRPr lang="ko-KR" altLang="en-US" dirty="0"/>
           </a:p>
@@ -7966,11 +9596,7 @@
             </a:r>
             <a:r>
               <a:rPr lang="en-US" altLang="ko-KR" dirty="0" smtClean="0"/>
-              <a:t>. S</a:t>
-            </a:r>
-            <a:r>
-              <a:rPr lang="en-US" altLang="ko-KR" dirty="0" smtClean="0"/>
-              <a:t>-type </a:t>
+              <a:t>. S-type </a:t>
             </a:r>
             <a:r>
               <a:rPr lang="ko-KR" altLang="en-US" dirty="0" smtClean="0"/>
@@ -8395,11 +10021,7 @@
             </a:r>
             <a:r>
               <a:rPr lang="en-US" altLang="ko-KR" dirty="0" smtClean="0"/>
-              <a:t>. S</a:t>
-            </a:r>
-            <a:r>
-              <a:rPr lang="en-US" altLang="ko-KR" dirty="0" smtClean="0"/>
-              <a:t>-type simulation</a:t>
+              <a:t>. S-type simulation</a:t>
             </a:r>
             <a:endParaRPr lang="ko-KR" altLang="en-US" dirty="0"/>
           </a:p>
@@ -8462,11 +10084,7 @@
             </a:r>
             <a:r>
               <a:rPr lang="en-US" altLang="ko-KR" dirty="0" smtClean="0"/>
-              <a:t>. IL</a:t>
-            </a:r>
-            <a:r>
-              <a:rPr lang="en-US" altLang="ko-KR" dirty="0" smtClean="0"/>
-              <a:t>-type</a:t>
+              <a:t>. IL-type</a:t>
             </a:r>
             <a:endParaRPr lang="ko-KR" altLang="en-US" dirty="0"/>
           </a:p>
@@ -9566,11 +11184,7 @@
             </a:r>
             <a:r>
               <a:rPr lang="en-US" altLang="ko-KR" dirty="0" smtClean="0"/>
-              <a:t>. IL</a:t>
-            </a:r>
-            <a:r>
-              <a:rPr lang="en-US" altLang="ko-KR" dirty="0" smtClean="0"/>
-              <a:t>-type</a:t>
+              <a:t>. IL-type</a:t>
             </a:r>
             <a:endParaRPr lang="ko-KR" altLang="en-US" dirty="0"/>
           </a:p>
@@ -10381,6 +11995,30 @@
           <a:chExt cx="0" cy="0"/>
         </a:xfrm>
       </p:grpSpPr>
+      <p:pic>
+        <p:nvPicPr>
+          <p:cNvPr id="10" name="그림 9"/>
+          <p:cNvPicPr>
+            <a:picLocks noChangeAspect="1"/>
+          </p:cNvPicPr>
+          <p:nvPr/>
+        </p:nvPicPr>
+        <p:blipFill>
+          <a:blip r:embed="rId2"/>
+          <a:stretch>
+            <a:fillRect/>
+          </a:stretch>
+        </p:blipFill>
+        <p:spPr>
+          <a:xfrm>
+            <a:off x="234275" y="1501290"/>
+            <a:ext cx="6091880" cy="5087060"/>
+          </a:xfrm>
+          <a:prstGeom prst="rect">
+            <a:avLst/>
+          </a:prstGeom>
+        </p:spPr>
+      </p:pic>
       <p:sp>
         <p:nvSpPr>
           <p:cNvPr id="2" name="제목 1">
@@ -10408,11 +12046,7 @@
             </a:r>
             <a:r>
               <a:rPr lang="en-US" altLang="ko-KR" dirty="0" smtClean="0"/>
-              <a:t>. IL</a:t>
-            </a:r>
-            <a:r>
-              <a:rPr lang="en-US" altLang="ko-KR" dirty="0" smtClean="0"/>
-              <a:t>-type </a:t>
+              <a:t>. IL-type </a:t>
             </a:r>
             <a:r>
               <a:rPr lang="ko-KR" altLang="en-US" dirty="0" smtClean="0"/>
@@ -10425,30 +12059,6 @@
       <p:pic>
         <p:nvPicPr>
           <p:cNvPr id="5" name="그림 4"/>
-          <p:cNvPicPr>
-            <a:picLocks noChangeAspect="1"/>
-          </p:cNvPicPr>
-          <p:nvPr/>
-        </p:nvPicPr>
-        <p:blipFill>
-          <a:blip r:embed="rId2"/>
-          <a:stretch>
-            <a:fillRect/>
-          </a:stretch>
-        </p:blipFill>
-        <p:spPr>
-          <a:xfrm>
-            <a:off x="8859389" y="75273"/>
-            <a:ext cx="3181794" cy="1905266"/>
-          </a:xfrm>
-          <a:prstGeom prst="rect">
-            <a:avLst/>
-          </a:prstGeom>
-        </p:spPr>
-      </p:pic>
-      <p:pic>
-        <p:nvPicPr>
-          <p:cNvPr id="6" name="그림 5"/>
           <p:cNvPicPr>
             <a:picLocks noChangeAspect="1"/>
           </p:cNvPicPr>
@@ -10462,8 +12072,8 @@
         </p:blipFill>
         <p:spPr>
           <a:xfrm>
-            <a:off x="269749" y="1386583"/>
-            <a:ext cx="6439799" cy="5353797"/>
+            <a:off x="9516066" y="0"/>
+            <a:ext cx="2675934" cy="1602356"/>
           </a:xfrm>
           <a:prstGeom prst="rect">
             <a:avLst/>
@@ -10478,8 +12088,8 @@
         </p:nvSpPr>
         <p:spPr>
           <a:xfrm>
-            <a:off x="6709548" y="2270391"/>
-            <a:ext cx="5331635" cy="4524315"/>
+            <a:off x="6621079" y="1787036"/>
+            <a:ext cx="5331635" cy="4801314"/>
           </a:xfrm>
           <a:prstGeom prst="rect">
             <a:avLst/>
@@ -10492,34 +12102,46 @@
           <a:lstStyle/>
           <a:p>
             <a:r>
+              <a:rPr lang="en-US" altLang="ko-KR" dirty="0" smtClean="0"/>
+              <a:t>[</a:t>
+            </a:r>
+            <a:r>
               <a:rPr lang="ko-KR" altLang="en-US" dirty="0" smtClean="0"/>
               <a:t>시나리오</a:t>
             </a:r>
+            <a:r>
+              <a:rPr lang="en-US" altLang="ko-KR" dirty="0" smtClean="0"/>
+              <a:t>]</a:t>
+            </a:r>
             <a:endParaRPr lang="en-US" altLang="ko-KR" dirty="0" smtClean="0"/>
           </a:p>
           <a:p>
-            <a:r>
-              <a:rPr lang="en-US" altLang="ko-KR" dirty="0" smtClean="0"/>
-              <a:t>1. </a:t>
-            </a:r>
+            <a:pPr marL="342900" indent="-342900">
+              <a:buAutoNum type="arabicPeriod"/>
+            </a:pPr>
             <a:r>
               <a:rPr lang="en-US" altLang="ko-KR" dirty="0" err="1" smtClean="0"/>
               <a:t>dmem</a:t>
             </a:r>
             <a:r>
               <a:rPr lang="en-US" altLang="ko-KR" dirty="0" smtClean="0"/>
-              <a:t>[0~1]</a:t>
+              <a:t>[0]</a:t>
             </a:r>
             <a:r>
               <a:rPr lang="ko-KR" altLang="en-US" dirty="0" smtClean="0"/>
               <a:t>에 값을 활용해 </a:t>
             </a:r>
-            <a:endParaRPr lang="en-US" altLang="ko-KR" dirty="0" smtClean="0"/>
-          </a:p>
-          <a:p>
+            <a:r>
+              <a:rPr lang="en-US" altLang="ko-KR" dirty="0"/>
+              <a:t> </a:t>
+            </a:r>
             <a:r>
               <a:rPr lang="en-US" altLang="ko-KR" dirty="0" smtClean="0"/>
-              <a:t>   </a:t>
+              <a:t>byte </a:t>
+            </a:r>
+            <a:r>
+              <a:rPr lang="ko-KR" altLang="en-US" dirty="0" smtClean="0"/>
+              <a:t>단위 </a:t>
             </a:r>
             <a:r>
               <a:rPr lang="en-US" altLang="ko-KR" dirty="0" err="1" smtClean="0"/>
@@ -10543,25 +12165,90 @@
             </a:r>
             <a:r>
               <a:rPr lang="ko-KR" altLang="en-US" dirty="0" smtClean="0"/>
-              <a:t>동작 확인</a:t>
+              <a:t>동작 </a:t>
+            </a:r>
+            <a:r>
+              <a:rPr lang="ko-KR" altLang="en-US" dirty="0" smtClean="0"/>
+              <a:t>확인</a:t>
             </a:r>
             <a:endParaRPr lang="en-US" altLang="ko-KR" dirty="0" smtClean="0"/>
           </a:p>
           <a:p>
+            <a:pPr marL="342900" indent="-342900">
+              <a:buAutoNum type="arabicPeriod"/>
+            </a:pPr>
+            <a:r>
+              <a:rPr lang="en-US" altLang="ko-KR" dirty="0" err="1" smtClean="0"/>
+              <a:t>imm</a:t>
+            </a:r>
+            <a:r>
+              <a:rPr lang="ko-KR" altLang="en-US" dirty="0"/>
+              <a:t> </a:t>
+            </a:r>
             <a:r>
               <a:rPr lang="en-US" altLang="ko-KR" dirty="0" smtClean="0"/>
-              <a:t>2. register[5]</a:t>
+              <a:t>:</a:t>
             </a:r>
             <a:r>
               <a:rPr lang="ko-KR" altLang="en-US" dirty="0" smtClean="0"/>
-              <a:t>에 잘 들어갔는지 확인</a:t>
-            </a:r>
-            <a:endParaRPr lang="en-US" altLang="ko-KR" dirty="0"/>
-          </a:p>
-          <a:p>
+              <a:t> </a:t>
+            </a:r>
+            <a:r>
+              <a:rPr lang="en-US" altLang="ko-KR" dirty="0" smtClean="0"/>
+              <a:t>byte</a:t>
+            </a:r>
+            <a:r>
+              <a:rPr lang="ko-KR" altLang="en-US" dirty="0" smtClean="0"/>
+              <a:t>단위 동작</a:t>
+            </a:r>
+            <a:r>
+              <a:rPr lang="en-US" altLang="ko-KR" dirty="0" smtClean="0"/>
+              <a:t>, </a:t>
+            </a:r>
+          </a:p>
+          <a:p>
+            <a:r>
+              <a:rPr lang="en-US" altLang="ko-KR" dirty="0"/>
+              <a:t> </a:t>
+            </a:r>
+            <a:r>
+              <a:rPr lang="en-US" altLang="ko-KR" dirty="0" smtClean="0"/>
+              <a:t>   rs1   : word address</a:t>
+            </a:r>
+            <a:r>
+              <a:rPr lang="ko-KR" altLang="en-US" dirty="0" smtClean="0"/>
+              <a:t>단위 동작 사용</a:t>
+            </a:r>
             <a:endParaRPr lang="en-US" altLang="ko-KR" dirty="0" smtClean="0"/>
           </a:p>
           <a:p>
+            <a:r>
+              <a:rPr lang="en-US" altLang="ko-KR" dirty="0"/>
+              <a:t>3</a:t>
+            </a:r>
+            <a:r>
+              <a:rPr lang="en-US" altLang="ko-KR" dirty="0" smtClean="0"/>
+              <a:t>.  register[5</a:t>
+            </a:r>
+            <a:r>
+              <a:rPr lang="en-US" altLang="ko-KR" dirty="0" smtClean="0"/>
+              <a:t>]</a:t>
+            </a:r>
+            <a:r>
+              <a:rPr lang="ko-KR" altLang="en-US" dirty="0" smtClean="0"/>
+              <a:t>에 잘 들어갔는지 </a:t>
+            </a:r>
+            <a:r>
+              <a:rPr lang="ko-KR" altLang="en-US" dirty="0" smtClean="0"/>
+              <a:t>확인</a:t>
+            </a:r>
+            <a:endParaRPr lang="en-US" altLang="ko-KR" dirty="0" smtClean="0"/>
+          </a:p>
+          <a:p>
+            <a:r>
+              <a:rPr lang="en-US" altLang="ko-KR" dirty="0" smtClean="0"/>
+              <a:t>------------------------------------------------------</a:t>
+            </a:r>
             <a:endParaRPr lang="en-US" altLang="ko-KR" dirty="0"/>
           </a:p>
           <a:p>
@@ -10758,6 +12445,42 @@
           </a:p>
         </p:txBody>
       </p:sp>
+      <p:cxnSp>
+        <p:nvCxnSpPr>
+          <p:cNvPr id="7" name="직선 화살표 연결선 6"/>
+          <p:cNvCxnSpPr/>
+          <p:nvPr/>
+        </p:nvCxnSpPr>
+        <p:spPr>
+          <a:xfrm>
+            <a:off x="2811624" y="2183363"/>
+            <a:ext cx="3897924" cy="510074"/>
+          </a:xfrm>
+          <a:prstGeom prst="straightConnector1">
+            <a:avLst/>
+          </a:prstGeom>
+          <a:ln w="76200">
+            <a:solidFill>
+              <a:srgbClr val="FFFF00"/>
+            </a:solidFill>
+            <a:tailEnd type="triangle"/>
+          </a:ln>
+        </p:spPr>
+        <p:style>
+          <a:lnRef idx="2">
+            <a:schemeClr val="accent1"/>
+          </a:lnRef>
+          <a:fillRef idx="0">
+            <a:schemeClr val="accent1"/>
+          </a:fillRef>
+          <a:effectRef idx="1">
+            <a:schemeClr val="accent1"/>
+          </a:effectRef>
+          <a:fontRef idx="minor">
+            <a:schemeClr val="tx1"/>
+          </a:fontRef>
+        </p:style>
+      </p:cxnSp>
     </p:spTree>
     <p:extLst>
       <p:ext uri="{BB962C8B-B14F-4D97-AF65-F5344CB8AC3E}">
